--- a/lectures/ITC444_Week1_Slides.pptx
+++ b/lectures/ITC444_Week1_Slides.pptx
@@ -4,6 +4,9 @@
   <p:sldMasterIdLst>
     <p:sldMasterId id="2147483648" r:id="rId1"/>
   </p:sldMasterIdLst>
+  <p:notesMasterIdLst>
+    <p:notesMasterId r:id="rId13"/>
+  </p:notesMasterIdLst>
   <p:sldIdLst>
     <p:sldId id="256" r:id="rId2"/>
     <p:sldId id="257" r:id="rId3"/>
@@ -17,10 +20,7 @@
     <p:sldId id="265" r:id="rId11"/>
     <p:sldId id="266" r:id="rId12"/>
   </p:sldIdLst>
-  <p:notesMasterIdLst>
-    <p:notesMasterId r:id="rId13"/>
-  </p:notesMasterIdLst>
-  <p:sldSz cx="9144000" cy="5143500"/>
+  <p:sldSz cx="9144000" cy="5143500" type="screen16x9"/>
   <p:notesSz cx="5143500" cy="9144000"/>
   <p:defaultTextStyle>
     <a:lvl1pPr marL="0" algn="l" defTabSz="914400" rtl="0" eaLnBrk="1" latinLnBrk="0" hangingPunct="1">
@@ -114,6 +114,11 @@
       </a:defRPr>
     </a:lvl9pPr>
   </p:defaultTextStyle>
+  <p:extLst>
+    <p:ext uri="{EFAFB233-063F-42B5-8137-9DF3F51BA10A}">
+      <p15:sldGuideLst xmlns:p15="http://schemas.microsoft.com/office/powerpoint/2012/main"/>
+    </p:ext>
+  </p:extLst>
 </p:presentation>
 </file>
 
@@ -139,234 +144,10 @@
           <a:chExt cx="0" cy="0"/>
         </a:xfrm>
       </p:grpSpPr>
-      <p:sp>
-        <p:nvSpPr>
-          <p:cNvPr id="2" name="Header Placeholder 1"/>
-          <p:cNvSpPr>
-            <a:spLocks noGrp="1"/>
-          </p:cNvSpPr>
-          <p:nvPr>
-            <p:ph type="hdr" sz="quarter"/>
-          </p:nvPr>
-        </p:nvSpPr>
-        <p:spPr>
-          <a:xfrm>
-            <a:off x="0" y="0"/>
-            <a:ext cx="2971800" cy="458788"/>
-          </a:xfrm>
-          <a:prstGeom prst="rect">
-            <a:avLst/>
-          </a:prstGeom>
-        </p:spPr>
-        <p:txBody>
-          <a:bodyPr vert="horz" lIns="91440" tIns="45720" rIns="91440" bIns="45720" rtlCol="0"/>
-          <a:lstStyle>
-            <a:lvl1pPr algn="l">
-              <a:defRPr sz="1200"/>
-            </a:lvl1pPr>
-          </a:lstStyle>
-          <a:p>
-            <a:endParaRPr lang="en-US"/>
-          </a:p>
-        </p:txBody>
-      </p:sp>
-      <p:sp>
-        <p:nvSpPr>
-          <p:cNvPr id="3" name="Date Placeholder 2"/>
-          <p:cNvSpPr>
-            <a:spLocks noGrp="1"/>
-          </p:cNvSpPr>
-          <p:nvPr>
-            <p:ph type="dt" idx="1"/>
-          </p:nvPr>
-        </p:nvSpPr>
-        <p:spPr>
-          <a:xfrm>
-            <a:off x="3884613" y="0"/>
-            <a:ext cx="2971800" cy="458788"/>
-          </a:xfrm>
-          <a:prstGeom prst="rect">
-            <a:avLst/>
-          </a:prstGeom>
-        </p:spPr>
-        <p:txBody>
-          <a:bodyPr vert="horz" lIns="91440" tIns="45720" rIns="91440" bIns="45720" rtlCol="0"/>
-          <a:lstStyle>
-            <a:lvl1pPr algn="r">
-              <a:defRPr sz="1200"/>
-            </a:lvl1pPr>
-          </a:lstStyle>
-          <a:p>
-            <a:fld id="{5282F153-3F37-0F45-9E97-73ACFA13230C}" type="datetimeFigureOut">
-              <a:rPr lang="en-US"/>
-              <a:t>7/23/19</a:t>
-            </a:fld>
-            <a:endParaRPr lang="en-US"/>
-          </a:p>
-        </p:txBody>
-      </p:sp>
-      <p:sp>
-        <p:nvSpPr>
-          <p:cNvPr id="4" name="Slide Image Placeholder 3"/>
-          <p:cNvSpPr>
-            <a:spLocks noGrp="1" noRot="1" noChangeAspect="1"/>
-          </p:cNvSpPr>
-          <p:nvPr>
-            <p:ph type="sldImg" idx="2"/>
-          </p:nvPr>
-        </p:nvSpPr>
-        <p:spPr>
-          <a:xfrm>
-            <a:off x="685800" y="1143000"/>
-            <a:ext cx="5486400" cy="3086100"/>
-          </a:xfrm>
-          <a:prstGeom prst="rect">
-            <a:avLst/>
-          </a:prstGeom>
-          <a:noFill/>
-          <a:ln w="12700">
-            <a:solidFill>
-              <a:prstClr val="black"/>
-            </a:solidFill>
-          </a:ln>
-        </p:spPr>
-        <p:txBody>
-          <a:bodyPr vert="horz" lIns="91440" tIns="45720" rIns="91440" bIns="45720" rtlCol="0" anchor="ctr"/>
-          <a:lstStyle/>
-          <a:p>
-            <a:endParaRPr lang="en-US"/>
-          </a:p>
-        </p:txBody>
-      </p:sp>
-      <p:sp>
-        <p:nvSpPr>
-          <p:cNvPr id="5" name="Notes Placeholder 4"/>
-          <p:cNvSpPr>
-            <a:spLocks noGrp="1"/>
-          </p:cNvSpPr>
-          <p:nvPr>
-            <p:ph type="body" sz="quarter" idx="3"/>
-          </p:nvPr>
-        </p:nvSpPr>
-        <p:spPr>
-          <a:xfrm>
-            <a:off x="685800" y="4400550"/>
-            <a:ext cx="5486400" cy="3600450"/>
-          </a:xfrm>
-          <a:prstGeom prst="rect">
-            <a:avLst/>
-          </a:prstGeom>
-        </p:spPr>
-        <p:txBody>
-          <a:bodyPr vert="horz" lIns="91440" tIns="45720" rIns="91440" bIns="45720" rtlCol="0"/>
-          <a:lstStyle/>
-          <a:p>
-            <a:pPr lvl="0"/>
-            <a:r>
-              <a:rPr lang="en-US"/>
-              <a:t>Click to edit Master text styles</a:t>
-            </a:r>
-          </a:p>
-          <a:p>
-            <a:pPr lvl="1"/>
-            <a:r>
-              <a:rPr lang="en-US"/>
-              <a:t>Second level</a:t>
-            </a:r>
-          </a:p>
-          <a:p>
-            <a:pPr lvl="2"/>
-            <a:r>
-              <a:rPr lang="en-US"/>
-              <a:t>Third level</a:t>
-            </a:r>
-          </a:p>
-          <a:p>
-            <a:pPr lvl="3"/>
-            <a:r>
-              <a:rPr lang="en-US"/>
-              <a:t>Fourth level</a:t>
-            </a:r>
-          </a:p>
-          <a:p>
-            <a:pPr lvl="4"/>
-            <a:r>
-              <a:rPr lang="en-US"/>
-              <a:t>Fifth level</a:t>
-            </a:r>
-          </a:p>
-        </p:txBody>
-      </p:sp>
-      <p:sp>
-        <p:nvSpPr>
-          <p:cNvPr id="6" name="Footer Placeholder 5"/>
-          <p:cNvSpPr>
-            <a:spLocks noGrp="1"/>
-          </p:cNvSpPr>
-          <p:nvPr>
-            <p:ph type="ftr" sz="quarter" idx="4"/>
-          </p:nvPr>
-        </p:nvSpPr>
-        <p:spPr>
-          <a:xfrm>
-            <a:off x="0" y="8685213"/>
-            <a:ext cx="2971800" cy="458787"/>
-          </a:xfrm>
-          <a:prstGeom prst="rect">
-            <a:avLst/>
-          </a:prstGeom>
-        </p:spPr>
-        <p:txBody>
-          <a:bodyPr vert="horz" lIns="91440" tIns="45720" rIns="91440" bIns="45720" rtlCol="0" anchor="b"/>
-          <a:lstStyle>
-            <a:lvl1pPr algn="l">
-              <a:defRPr sz="1200"/>
-            </a:lvl1pPr>
-          </a:lstStyle>
-          <a:p>
-            <a:endParaRPr lang="en-US"/>
-          </a:p>
-        </p:txBody>
-      </p:sp>
-      <p:sp>
-        <p:nvSpPr>
-          <p:cNvPr id="7" name="Slide Number Placeholder 6"/>
-          <p:cNvSpPr>
-            <a:spLocks noGrp="1"/>
-          </p:cNvSpPr>
-          <p:nvPr>
-            <p:ph type="sldNum" sz="quarter" idx="5"/>
-          </p:nvPr>
-        </p:nvSpPr>
-        <p:spPr>
-          <a:xfrm>
-            <a:off x="3884613" y="8685213"/>
-            <a:ext cx="2971800" cy="458787"/>
-          </a:xfrm>
-          <a:prstGeom prst="rect">
-            <a:avLst/>
-          </a:prstGeom>
-        </p:spPr>
-        <p:txBody>
-          <a:bodyPr vert="horz" lIns="91440" tIns="45720" rIns="91440" bIns="45720" rtlCol="0" anchor="b"/>
-          <a:lstStyle>
-            <a:lvl1pPr algn="r">
-              <a:defRPr sz="1200"/>
-            </a:lvl1pPr>
-          </a:lstStyle>
-          <a:p>
-            <a:fld id="{CE5E9CC1-C706-0F49-92D6-E571CC5EEA8F}" type="slidenum">
-              <a:rPr lang="en-US"/>
-              <a:t>‹#›</a:t>
-            </a:fld>
-            <a:endParaRPr lang="en-US"/>
-          </a:p>
-        </p:txBody>
-      </p:sp>
     </p:spTree>
     <p:extLst>
       <p:ext uri="{BB962C8B-B14F-4D97-AF65-F5344CB8AC3E}">
-        <p14:creationId xmlns:p14="http://schemas.microsoft.com/office/powerpoint/2010/main" val="1024086991"/>
+        <p14:creationId xmlns:p14="http://schemas.microsoft.com/office/powerpoint/2010/main" val="307907498"/>
       </p:ext>
     </p:extLst>
   </p:cSld>
@@ -512,8 +293,34 @@
           <a:p>
             <a:r>
               <a:rPr lang="en-US" dirty="0"/>
-              <a:t/>
-            </a:r>
+              <a:t>Welcome to CYBER 444 — Advanced System Administration and Hardening. This course is the practitioner-focused follow-on to introductory networking and OS courses.</a:t>
+            </a:r>
+          </a:p>
+          <a:p>
+            <a:r>
+              <a:rPr lang="en-US" dirty="0"/>
+              <a:t>Over the next 15 weeks, students will build, harden, audit, and automate two Linux servers from scratch. Every concept is grounded in a real lab.</a:t>
+            </a:r>
+          </a:p>
+          <a:p>
+            <a:r>
+              <a:rPr lang="en-US" dirty="0"/>
+              <a:t>Introduce yourself briefly. Ask students what brought them to this course — most will be interested in security operations, cloud, or DoD career tracks.</a:t>
+            </a:r>
+          </a:p>
+          <a:p>
+            <a:r>
+              <a:rPr lang="en-US" dirty="0"/>
+              <a:t>Key point: this course treats security as inseparable from administration. A sysadmin who ignores hardening is a liability. We fix that here.</a:t>
+            </a:r>
+          </a:p>
+          <a:p>
+            <a:r>
+              <a:rPr lang="en-US" dirty="0"/>
+              <a:t>Logistics: Canvas is the source of truth for due dates. Lab instructions are posted by Friday before class. Late work loses 10% per day.</a:t>
+            </a:r>
+          </a:p>
+          <a:p>
             <a:endParaRPr lang="en-US" dirty="0"/>
           </a:p>
         </p:txBody>
@@ -600,8 +407,46 @@
           <a:p>
             <a:r>
               <a:rPr lang="en-US" dirty="0"/>
-              <a:t/>
-            </a:r>
+              <a:t>Lab 1 is the most important lab of the semester because everything else depends on it. Students who don't complete Lab 1 successfully cannot do Labs 2-14.</a:t>
+            </a:r>
+          </a:p>
+          <a:p>
+            <a:r>
+              <a:rPr lang="en-US" dirty="0"/>
+              <a:t>Walk through each step on the board or share your screen. Steps 1-3 are the environment setup — most of class time for Week 1 should be reserved for getting VMs running.</a:t>
+            </a:r>
+          </a:p>
+          <a:p>
+            <a:r>
+              <a:rPr lang="en-US" dirty="0"/>
+              <a:t>Step 4 (CIS-CAT Lite): students download it from cisecurity.org — requires a free registration. The Lite version is a .zip with a shell script. Run it as root or with sudo.</a:t>
+            </a:r>
+          </a:p>
+          <a:p>
+            <a:r>
+              <a:rPr lang="en-US" dirty="0"/>
+              <a:t>Step 5 output: a fresh Rocky Linux 9 minimal install will typically score 20-30% on CIS Level 1 out of the box. This is expected. The low score is the starting point, not a failure.</a:t>
+            </a:r>
+          </a:p>
+          <a:p>
+            <a:r>
+              <a:rPr lang="en-US" dirty="0"/>
+              <a:t>Step 7 (screenshot): students commonly forget this. The lowest-scoring control section shows where the most hardening work is needed. This establishes a before/after baseline.</a:t>
+            </a:r>
+          </a:p>
+          <a:p>
+            <a:r>
+              <a:rPr lang="en-US" dirty="0"/>
+              <a:t>HW 1 (Syllabus Quiz): 10 points, unlimited attempts, open-note. It tests whether students read the syllabus. Review the late policy one more time — it's the most common source of grade disputes.</a:t>
+            </a:r>
+          </a:p>
+          <a:p>
+            <a:r>
+              <a:rPr lang="en-US" dirty="0"/>
+              <a:t>Before Next Class: the three downloads (Rocky Linux, Ubuntu, STIG Viewer bookmark) should be done before students leave or over the next 24 hours. ISOs are large — don't leave downloads for the night before Week 2.</a:t>
+            </a:r>
+          </a:p>
+          <a:p>
             <a:endParaRPr lang="en-US" dirty="0"/>
           </a:p>
         </p:txBody>
@@ -688,8 +533,34 @@
           <a:p>
             <a:r>
               <a:rPr lang="en-US" dirty="0"/>
-              <a:t/>
-            </a:r>
+              <a:t>Recap the five key takeaways. Ask students to close their laptops and recall one thing from each bullet — this is a quick knowledge check without feeling like a quiz.</a:t>
+            </a:r>
+          </a:p>
+          <a:p>
+            <a:r>
+              <a:rPr lang="en-US" dirty="0"/>
+              <a:t>Week 2 preview: OS Hardening Fundamentals is where the real work starts. Students will apply CIS Level 1 controls to Rocky Linux, touching PAM, systemd, and kernel parameters. It's a dense week — encourage them to look at the slides in advance.</a:t>
+            </a:r>
+          </a:p>
+          <a:p>
+            <a:r>
+              <a:rPr lang="en-US" dirty="0"/>
+              <a:t>The Lab 2 target of ≥ 80% CIS compliance is achievable with a systematic approach. Students who understand WHY each control exists find remediation much faster than those who apply settings blindly.</a:t>
+            </a:r>
+          </a:p>
+          <a:p>
+            <a:r>
+              <a:rPr lang="en-US" dirty="0"/>
+              <a:t>Final housekeeping: remind students that office hours are posted in Canvas, the course Slack/Teams channel is active for peer help, and lab VMs should be snapshotted before each major change.</a:t>
+            </a:r>
+          </a:p>
+          <a:p>
+            <a:r>
+              <a:rPr lang="en-US" dirty="0"/>
+              <a:t>Take questions. Common questions at this point: 'Can I use a cloud VM instead of local?' (Yes, with limitations). 'Is the capstone a team project?' (Individual by default, optional pairs). 'What if my computer is too slow?' (See the instructor — campus lab access is available).</a:t>
+            </a:r>
+          </a:p>
+          <a:p>
             <a:endParaRPr lang="en-US" dirty="0"/>
           </a:p>
         </p:txBody>
@@ -776,8 +647,34 @@
           <a:p>
             <a:r>
               <a:rPr lang="en-US" dirty="0"/>
-              <a:t/>
-            </a:r>
+              <a:t>Walk through today's six agenda items at a high level. Tell students not to write notes yet — the slides are on Canvas.</a:t>
+            </a:r>
+          </a:p>
+          <a:p>
+            <a:r>
+              <a:rPr lang="en-US" dirty="0"/>
+              <a:t>The first half covers the 'why': what a sysadmin actually does, how we map to NICE work roles, and what frameworks (CIS/STIGs) we use.</a:t>
+            </a:r>
+          </a:p>
+          <a:p>
+            <a:r>
+              <a:rPr lang="en-US" dirty="0"/>
+              <a:t>The second half is practical: lab environment specs, the toolchain we'll use all semester, and the Week 1 lab walkthrough.</a:t>
+            </a:r>
+          </a:p>
+          <a:p>
+            <a:r>
+              <a:rPr lang="en-US" dirty="0"/>
+              <a:t>Time check: plan roughly 10 minutes per agenda block. Leave 15 minutes at the end for questions and lab troubleshooting.</a:t>
+            </a:r>
+          </a:p>
+          <a:p>
+            <a:r>
+              <a:rPr lang="en-US" dirty="0"/>
+              <a:t>Remind students: the Canvas quiz for HW 1 is based on today's slides and the syllabus. It's open-note and due before Week 2.</a:t>
+            </a:r>
+          </a:p>
+          <a:p>
             <a:endParaRPr lang="en-US" dirty="0"/>
           </a:p>
         </p:txBody>
@@ -864,8 +761,34 @@
           <a:p>
             <a:r>
               <a:rPr lang="en-US" dirty="0"/>
-              <a:t/>
-            </a:r>
+              <a:t>Walk through each row of the course modules. Emphasize the progression: Weeks 1-3 build the foundation (VMs, baseline scans). Weeks 4-6 add vulnerability management. Weeks 7-9 focus on visibility. Weeks 10-12 automate everything. Weeks 13-15 prove it with a capstone.</a:t>
+            </a:r>
+          </a:p>
+          <a:p>
+            <a:r>
+              <a:rPr lang="en-US" dirty="0"/>
+              <a:t>Assessment breakdown: labs are worth the most (35%) because competency is demonstrated through doing, not memorizing. Stress that partial credit is given on labs — a documented attempt with reasonable output earns most of the points.</a:t>
+            </a:r>
+          </a:p>
+          <a:p>
+            <a:r>
+              <a:rPr lang="en-US" dirty="0"/>
+              <a:t>The 14 labs are designed to build on each other. Falling behind on Lab 3 makes Lab 4 harder. Keep up weekly.</a:t>
+            </a:r>
+          </a:p>
+          <a:p>
+            <a:r>
+              <a:rPr lang="en-US" dirty="0"/>
+              <a:t>The capstone (Weeks 13-15) is a hardened server deployment evaluated against a real STIG checklist. Students often cite it as the most resume-relevant project they've done.</a:t>
+            </a:r>
+          </a:p>
+          <a:p>
+            <a:r>
+              <a:rPr lang="en-US" dirty="0"/>
+              <a:t>Ask: 'Who has taken a compliance or security audit course before?' — this helps gauge background. Adjust pacing of the frameworks slides accordingly.</a:t>
+            </a:r>
+          </a:p>
+          <a:p>
             <a:endParaRPr lang="en-US" dirty="0"/>
           </a:p>
         </p:txBody>
@@ -952,8 +875,40 @@
           <a:p>
             <a:r>
               <a:rPr lang="en-US" dirty="0"/>
-              <a:t/>
-            </a:r>
+              <a:t>SysAdmins are generalists who own everything below the application layer: OS, networking, storage, identity, and increasingly security.</a:t>
+            </a:r>
+          </a:p>
+          <a:p>
+            <a:r>
+              <a:rPr lang="en-US" dirty="0"/>
+              <a:t>The three scales on this slide matter because job descriptions differ significantly. Enterprise shops have dedicated security teams and ticketing workflows. SMBs often have one person doing everything.</a:t>
+            </a:r>
+          </a:p>
+          <a:p>
+            <a:r>
+              <a:rPr lang="en-US" dirty="0"/>
+              <a:t>At all three scales, the security hardening column is now non-negotiable. Cloud providers and compliance frameworks have made baseline security a minimum requirement, not an optional add-on.</a:t>
+            </a:r>
+          </a:p>
+          <a:p>
+            <a:r>
+              <a:rPr lang="en-US" dirty="0"/>
+              <a:t>Key insight: the automation column is what separates junior from senior admins. Manually configuring 10 servers is feasible. Manually configuring 1,000 is not. We'll be automating by Week 10.</a:t>
+            </a:r>
+          </a:p>
+          <a:p>
+            <a:r>
+              <a:rPr lang="en-US" dirty="0"/>
+              <a:t>Compliance is often where students are surprised — audit trails, scan reports, and evidence packages are a real and large part of the job, especially in government/defense adjacent environments.</a:t>
+            </a:r>
+          </a:p>
+          <a:p>
+            <a:r>
+              <a:rPr lang="en-US" dirty="0"/>
+              <a:t>Ask students: 'What kind of environment do you expect to work in after this course?' This surfaces career goals and helps tailor examples throughout the semester.</a:t>
+            </a:r>
+          </a:p>
+          <a:p>
             <a:endParaRPr lang="en-US" dirty="0"/>
           </a:p>
         </p:txBody>
@@ -1040,8 +995,40 @@
           <a:p>
             <a:r>
               <a:rPr lang="en-US" dirty="0"/>
-              <a:t/>
-            </a:r>
+              <a:t>NIST SP 800-181, the NICE Cybersecurity Workforce Framework, is the standard that employers and DoD agencies use to define cybersecurity job roles. Knowing your work role by its NICE code can help on federal applications.</a:t>
+            </a:r>
+          </a:p>
+          <a:p>
+            <a:r>
+              <a:rPr lang="en-US" dirty="0"/>
+              <a:t>IO-WRL-005 (System Administrator) maps almost exactly to the first 10 weeks of this course: provisioning, hardening, patch management, access controls.</a:t>
+            </a:r>
+          </a:p>
+          <a:p>
+            <a:r>
+              <a:rPr lang="en-US" dirty="0"/>
+              <a:t>IO-WRL-007 (Network Operations Specialist) covers Weeks 8-12: firewall rules, DNS/DHCP management, VPN, monitoring network services.</a:t>
+            </a:r>
+          </a:p>
+          <a:p>
+            <a:r>
+              <a:rPr lang="en-US" dirty="0"/>
+              <a:t>These codes matter for students pursuing government positions, clearances, or DoD contracts — many job postings reference NICE work roles directly.</a:t>
+            </a:r>
+          </a:p>
+          <a:p>
+            <a:r>
+              <a:rPr lang="en-US" dirty="0"/>
+              <a:t>Point out the overlap between the two work roles. Modern environments don't have clean boundaries — network and system administration converge in cloud and containerized environments.</a:t>
+            </a:r>
+          </a:p>
+          <a:p>
+            <a:r>
+              <a:rPr lang="en-US" dirty="0"/>
+              <a:t>Students can look up their target job roles at niccs.cisa.gov. Encourage them to map their own career goals to specific NICE work roles as a semester exercise.</a:t>
+            </a:r>
+          </a:p>
+          <a:p>
             <a:endParaRPr lang="en-US" dirty="0"/>
           </a:p>
         </p:txBody>
@@ -1128,8 +1115,46 @@
           <a:p>
             <a:r>
               <a:rPr lang="en-US" dirty="0"/>
-              <a:t/>
-            </a:r>
+              <a:t>The lab environment is the foundation of everything we do. If students don't get this working in Week 1, they fall behind immediately. Budget extra time here.</a:t>
+            </a:r>
+          </a:p>
+          <a:p>
+            <a:r>
+              <a:rPr lang="en-US" dirty="0"/>
+              <a:t>Host machine requirements: 16 GB RAM is the real minimum. Students with only 8 GB will struggle. If any student has hardware limitations, discuss options: lab access on campus, cloud alternatives (AWS/Azure free tiers), or borrowing equipment.</a:t>
+            </a:r>
+          </a:p>
+          <a:p>
+            <a:r>
+              <a:rPr lang="en-US" dirty="0"/>
+              <a:t>Why two VMs? Server-to-server interactions require a second node. Later labs involve SSH key distribution, Ansible push configurations, syslog forwarding, and firewall rule testing between VM-1 and VM-2. A single VM can't demonstrate network-layer controls.</a:t>
+            </a:r>
+          </a:p>
+          <a:p>
+            <a:r>
+              <a:rPr lang="en-US" dirty="0"/>
+              <a:t>The Host-Only network (192.168.56.0/24) is isolated from the internet. NAT is for internet access. Students commonly misconfigure this — draw the network topology on the board.</a:t>
+            </a:r>
+          </a:p>
+          <a:p>
+            <a:r>
+              <a:rPr lang="en-US" dirty="0"/>
+              <a:t>Rocky Linux 9 is our primary platform because it mirrors RHEL 9, which is the most common enterprise Linux in DoD and government environments. Ubuntu 22.04 is our secondary because it's the dominant cloud and DevOps platform.</a:t>
+            </a:r>
+          </a:p>
+          <a:p>
+            <a:r>
+              <a:rPr lang="en-US" dirty="0"/>
+              <a:t>No GUI on either VM. Everything is CLI. This is intentional — real hardening is done at the command line and via configuration files, not GUI wizards.</a:t>
+            </a:r>
+          </a:p>
+          <a:p>
+            <a:r>
+              <a:rPr lang="en-US" dirty="0"/>
+              <a:t>Common Week 1 issues: VirtualBox Extension Pack missing, ISO hash mismatch, network adapter not set to Host-Only. Walk through each at the board or share a troubleshooting guide link.</a:t>
+            </a:r>
+          </a:p>
+          <a:p>
             <a:endParaRPr lang="en-US" dirty="0"/>
           </a:p>
         </p:txBody>
@@ -1216,8 +1241,40 @@
           <a:p>
             <a:r>
               <a:rPr lang="en-US" dirty="0"/>
-              <a:t/>
-            </a:r>
+              <a:t>The CIS Controls are the practical entry point into hardening. Unlike STIGs, they're platform-agnostic at the control level — Control 4 (Secure Configuration) applies whether you're running Linux, Windows, or a router.</a:t>
+            </a:r>
+          </a:p>
+          <a:p>
+            <a:r>
+              <a:rPr lang="en-US" dirty="0"/>
+              <a:t>The 18 controls are ordered by impact. Controls 1-6 (IG1) address the attacks that cause 85% of breaches according to CIS research. Start there.</a:t>
+            </a:r>
+          </a:p>
+          <a:p>
+            <a:r>
+              <a:rPr lang="en-US" dirty="0"/>
+              <a:t>Implementation Groups: IG1 is 56 safeguards — minimum viable security for any org. IG2 adds 74 more for orgs with security staff. IG3 adds 23 more for mature, risk-conscious enterprises. This course covers IG1 and IG2 controls in depth.</a:t>
+            </a:r>
+          </a:p>
+          <a:p>
+            <a:r>
+              <a:rPr lang="en-US" dirty="0"/>
+              <a:t>CIS Benchmarks are the technical implementation of the Controls for specific platforms. The CIS Rocky Linux 9 Benchmark, for example, maps specific kernel parameters, PAM settings, and service configurations to the 18 high-level controls.</a:t>
+            </a:r>
+          </a:p>
+          <a:p>
+            <a:r>
+              <a:rPr lang="en-US" dirty="0"/>
+              <a:t>Level 1 benchmarks are non-disruptive. Level 2 benchmarks can break applications — always test before applying Level 2 in production.</a:t>
+            </a:r>
+          </a:p>
+          <a:p>
+            <a:r>
+              <a:rPr lang="en-US" dirty="0"/>
+              <a:t>Ask: 'Why would an organization choose CIS over DISA STIGs?' Answer: CIS is vendor-neutral, more accessible, and used broadly in industry. STIGs are required for DoD. Many shops apply both.</a:t>
+            </a:r>
+          </a:p>
+          <a:p>
             <a:endParaRPr lang="en-US" dirty="0"/>
           </a:p>
         </p:txBody>
@@ -1304,8 +1361,46 @@
           <a:p>
             <a:r>
               <a:rPr lang="en-US" dirty="0"/>
-              <a:t/>
-            </a:r>
+              <a:t>DISA STIGs are the gold standard for DoD-connected systems. If a student plans to work in defense, government, or as a contractor, STIGs are unavoidable. This makes the STIG module one of the most career-relevant parts of the course.</a:t>
+            </a:r>
+          </a:p>
+          <a:p>
+            <a:r>
+              <a:rPr lang="en-US" dirty="0"/>
+              <a:t>STIGs are written in XCCDF — Extensible Configuration Checklist Description Format. It's XML-based and machine-readable. STIG Viewer (free from public.cyber.mil) parses these files and presents them in a human-readable checklist.</a:t>
+            </a:r>
+          </a:p>
+          <a:p>
+            <a:r>
+              <a:rPr lang="en-US" dirty="0"/>
+              <a:t>CAT I findings are the non-negotiables. No system with an open CAT I goes into production without an approved exception — a formal Risk Acceptance signed by the Authorizing Official. In practice, CAT I findings must be fixed before ATO.</a:t>
+            </a:r>
+          </a:p>
+          <a:p>
+            <a:r>
+              <a:rPr lang="en-US" dirty="0"/>
+              <a:t>CAT II findings are common — most systems have 30-50 open CAT IIs fresh from a standard install. We'll work through a real RHEL 9 STIG in Lab 5.</a:t>
+            </a:r>
+          </a:p>
+          <a:p>
+            <a:r>
+              <a:rPr lang="en-US" dirty="0"/>
+              <a:t>CAT III findings are best-practice hardening. Many organizations choose not to close all CAT IIIs due to operational impact — but they must be documented in a Plan of Action and Milestones (POA&amp;M).</a:t>
+            </a:r>
+          </a:p>
+          <a:p>
+            <a:r>
+              <a:rPr lang="en-US" dirty="0"/>
+              <a:t>Key difference between CIS and STIGs: CIS is scored as a percentage (you get a compliance score). STIGs are pass/fail per finding with severity weight. Both approaches are valid; the course teaches both.</a:t>
+            </a:r>
+          </a:p>
+          <a:p>
+            <a:r>
+              <a:rPr lang="en-US" dirty="0"/>
+              <a:t>The DISA STIG quarterly release cycle matters. A finding that passes today might fail next quarter if DISA tightens the requirement. ConMon (continuous monitoring) exists to catch this drift.</a:t>
+            </a:r>
+          </a:p>
+          <a:p>
             <a:endParaRPr lang="en-US" dirty="0"/>
           </a:p>
         </p:txBody>
@@ -1392,8 +1487,52 @@
           <a:p>
             <a:r>
               <a:rPr lang="en-US" dirty="0"/>
-              <a:t/>
-            </a:r>
+              <a:t>Walk through each tool briefly. Reassure students that we'll learn each one hands-on — today is just orientation.</a:t>
+            </a:r>
+          </a:p>
+          <a:p>
+            <a:r>
+              <a:rPr lang="en-US" dirty="0"/>
+              <a:t>Ansible: agentless means no daemon running on managed nodes. It uses SSH with key-based auth. We'll write our first playbook in Week 10. Key concept: idempotency — running the same playbook twice produces the same result.</a:t>
+            </a:r>
+          </a:p>
+          <a:p>
+            <a:r>
+              <a:rPr lang="en-US" dirty="0"/>
+              <a:t>Nessus Essentials: free for up to 16 IPs. Students register for a free activation code at tenable.com. It's the industry-standard vulnerability scanner. We use it in Labs 4 and 5.</a:t>
+            </a:r>
+          </a:p>
+          <a:p>
+            <a:r>
+              <a:rPr lang="en-US" dirty="0"/>
+              <a:t>STIG Viewer 3.x: download from public.cyber.mil. It reads STIG XCCDF files and lets you mark findings as Open, Not Applicable, or Not a Finding — exactly what an auditor does. No install required (it's a JAR file).</a:t>
+            </a:r>
+          </a:p>
+          <a:p>
+            <a:r>
+              <a:rPr lang="en-US" dirty="0"/>
+              <a:t>CIS-CAT Lite: free tier of the CIS benchmark automation tool. It scans a system and outputs an HTML compliance report with a score. This is what students use in Lab 1.</a:t>
+            </a:r>
+          </a:p>
+          <a:p>
+            <a:r>
+              <a:rPr lang="en-US" dirty="0"/>
+              <a:t>OpenSCAP/oscap: the Linux-native SCAP scanner. Pre-installed on RHEL/Rocky via openscap-scanner package. Used in Labs 3, 8, and 14. Critical for automation workflows.</a:t>
+            </a:r>
+          </a:p>
+          <a:p>
+            <a:r>
+              <a:rPr lang="en-US" dirty="0"/>
+              <a:t>Graylog: we introduce it in Week 9. It's a log aggregation platform — think of it as a lightweight SIEM. Both VMs will ship logs to Graylog for alerting and dashboarding.</a:t>
+            </a:r>
+          </a:p>
+          <a:p>
+            <a:r>
+              <a:rPr lang="en-US" dirty="0"/>
+              <a:t>Ask if anyone has used any of these tools professionally. This anchors the toolchain to real experience in the room.</a:t>
+            </a:r>
+          </a:p>
+          <a:p>
             <a:endParaRPr lang="en-US" dirty="0"/>
           </a:p>
         </p:txBody>
@@ -1467,6 +1606,11 @@
 <file path=ppt/slideMasters/slideMaster1.xml><?xml version="1.0" encoding="utf-8"?>
 <p:sldMaster xmlns:a="http://schemas.openxmlformats.org/drawingml/2006/main" xmlns:r="http://schemas.openxmlformats.org/officeDocument/2006/relationships" xmlns:p="http://schemas.openxmlformats.org/presentationml/2006/main">
   <p:cSld>
+    <p:bg>
+      <p:bgRef idx="1001">
+        <a:schemeClr val="bg1"/>
+      </p:bgRef>
+    </p:bg>
     <p:spTree>
       <p:nvGrpSpPr>
         <p:cNvPr id="1" name=""/>
@@ -1749,6 +1893,7 @@
         <a:solidFill>
           <a:srgbClr val="1F3864"/>
         </a:solidFill>
+        <a:effectLst/>
       </p:bgPr>
     </p:bg>
     <p:spTree>
@@ -1784,6 +1929,13 @@
           </a:solidFill>
           <a:ln/>
         </p:spPr>
+        <p:txBody>
+          <a:bodyPr/>
+          <a:lstStyle/>
+          <a:p>
+            <a:endParaRPr lang="en-US"/>
+          </a:p>
+        </p:txBody>
       </p:sp>
       <p:sp>
         <p:nvSpPr>
@@ -1804,6 +1956,13 @@
           </a:solidFill>
           <a:ln/>
         </p:spPr>
+        <p:txBody>
+          <a:bodyPr/>
+          <a:lstStyle/>
+          <a:p>
+            <a:endParaRPr lang="en-US"/>
+          </a:p>
+        </p:txBody>
       </p:sp>
       <p:sp>
         <p:nvSpPr>
@@ -1824,6 +1983,13 @@
           </a:solidFill>
           <a:ln/>
         </p:spPr>
+        <p:txBody>
+          <a:bodyPr/>
+          <a:lstStyle/>
+          <a:p>
+            <a:endParaRPr lang="en-US"/>
+          </a:p>
+        </p:txBody>
       </p:sp>
       <p:sp>
         <p:nvSpPr>
@@ -1844,6 +2010,13 @@
           </a:solidFill>
           <a:ln/>
         </p:spPr>
+        <p:txBody>
+          <a:bodyPr/>
+          <a:lstStyle/>
+          <a:p>
+            <a:endParaRPr lang="en-US"/>
+          </a:p>
+        </p:txBody>
       </p:sp>
       <p:sp>
         <p:nvSpPr>
@@ -1866,11 +2039,11 @@
           <a:bodyPr wrap="square" lIns="0" tIns="0" rIns="0" bIns="0" rtlCol="0" anchor="ctr"/>
           <a:lstStyle/>
           <a:p>
-            <a:pPr indent="0" marL="0">
-              <a:buNone/>
-            </a:pPr>
-            <a:r>
-              <a:rPr lang="en-US" sz="1200" spc="150" kern="0" dirty="0">
+            <a:pPr marL="0" indent="0">
+              <a:buNone/>
+            </a:pPr>
+            <a:r>
+              <a:rPr lang="en-US" sz="1200" kern="0" spc="150" dirty="0">
                 <a:solidFill>
                   <a:srgbClr val="BDD7EE"/>
                 </a:solidFill>
@@ -1878,7 +2051,7 @@
                 <a:ea typeface="Calibri" pitchFamily="34" charset="-122"/>
                 <a:cs typeface="Calibri" pitchFamily="34" charset="-120"/>
               </a:rPr>
-              <a:t>IT&amp;C 444  ·  Advanced System Administration &amp; Hardening</a:t>
+              <a:t>CYBER 444  ·  Advanced System Administration &amp; Hardening</a:t>
             </a:r>
             <a:endParaRPr lang="en-US" sz="1200" dirty="0"/>
           </a:p>
@@ -1905,7 +2078,7 @@
           <a:bodyPr wrap="square" lIns="0" tIns="0" rIns="0" bIns="0" rtlCol="0" anchor="t"/>
           <a:lstStyle/>
           <a:p>
-            <a:pPr indent="0" marL="0">
+            <a:pPr marL="0" indent="0">
               <a:buNone/>
             </a:pPr>
             <a:r>
@@ -1922,7 +2095,7 @@
             <a:endParaRPr lang="en-US" sz="3800" dirty="0"/>
           </a:p>
           <a:p>
-            <a:pPr indent="0" marL="0">
+            <a:pPr marL="0" indent="0">
               <a:buNone/>
             </a:pPr>
             <a:r>
@@ -1959,6 +2132,13 @@
           </a:solidFill>
           <a:ln/>
         </p:spPr>
+        <p:txBody>
+          <a:bodyPr/>
+          <a:lstStyle/>
+          <a:p>
+            <a:endParaRPr lang="en-US"/>
+          </a:p>
+        </p:txBody>
       </p:sp>
       <p:sp>
         <p:nvSpPr>
@@ -1981,34 +2161,23 @@
           <a:bodyPr wrap="square" lIns="0" tIns="0" rIns="0" bIns="0" rtlCol="0" anchor="ctr"/>
           <a:lstStyle/>
           <a:p>
-            <a:pPr indent="0" marL="0">
-              <a:buNone/>
-            </a:pPr>
-            <a:r>
-              <a:rPr lang="en-US" sz="1200" i="1" dirty="0">
-                <a:solidFill>
-                  <a:srgbClr val="8BACD4"/>
-                </a:solidFill>
-                <a:latin typeface="Calibri" pitchFamily="34" charset="0"/>
-                <a:ea typeface="Calibri" pitchFamily="34" charset="-122"/>
-                <a:cs typeface="Calibri" pitchFamily="34" charset="-120"/>
-              </a:rPr>
-              <a:t>Spring Semester  ·  3 Credit Hours  ·  Infrastructure Track</a:t>
-            </a:r>
+            <a:pPr marL="0" indent="0">
+              <a:buNone/>
+            </a:pPr>
             <a:endParaRPr lang="en-US" sz="1200" dirty="0"/>
           </a:p>
         </p:txBody>
       </p:sp>
       <p:pic>
         <p:nvPicPr>
-          <p:cNvPr id="10" name="Image 0" descr="preencoded.png">    </p:cNvPr>
+          <p:cNvPr id="10" name="Image 0" descr="preencoded.png"/>
           <p:cNvPicPr>
             <a:picLocks noChangeAspect="1"/>
           </p:cNvPicPr>
           <p:nvPr/>
         </p:nvPicPr>
         <p:blipFill>
-          <a:blip r:embed="rId1">
+          <a:blip r:embed="rId3">
             <a:alphaModFix amt="75000"/>
           </a:blip>
           <a:stretch>
@@ -2046,7 +2215,7 @@
           <a:bodyPr wrap="square" lIns="0" tIns="0" rIns="0" bIns="0" rtlCol="0" anchor="ctr"/>
           <a:lstStyle/>
           <a:p>
-            <a:pPr algn="r" indent="0" marL="0">
+            <a:pPr marL="0" indent="0" algn="r">
               <a:buNone/>
             </a:pPr>
             <a:r>
@@ -2080,6 +2249,7 @@
         <a:solidFill>
           <a:srgbClr val="F5F8FC"/>
         </a:solidFill>
+        <a:effectLst/>
       </p:bgPr>
     </p:bg>
     <p:spTree>
@@ -2120,6 +2290,13 @@
             <a:prstDash val="solid"/>
           </a:ln>
         </p:spPr>
+        <p:txBody>
+          <a:bodyPr/>
+          <a:lstStyle/>
+          <a:p>
+            <a:endParaRPr lang="en-US"/>
+          </a:p>
+        </p:txBody>
       </p:sp>
       <p:sp>
         <p:nvSpPr>
@@ -2142,7 +2319,7 @@
           <a:bodyPr wrap="square" lIns="0" tIns="0" rIns="0" bIns="0" rtlCol="0" anchor="ctr"/>
           <a:lstStyle/>
           <a:p>
-            <a:pPr indent="0" marL="0">
+            <a:pPr marL="0" indent="0">
               <a:buNone/>
             </a:pPr>
             <a:r>
@@ -2184,6 +2361,13 @@
             <a:prstDash val="solid"/>
           </a:ln>
         </p:spPr>
+        <p:txBody>
+          <a:bodyPr/>
+          <a:lstStyle/>
+          <a:p>
+            <a:endParaRPr lang="en-US"/>
+          </a:p>
+        </p:txBody>
       </p:sp>
       <p:sp>
         <p:nvSpPr>
@@ -2209,13 +2393,20 @@
             <a:prstDash val="solid"/>
           </a:ln>
           <a:effectLst>
-            <a:outerShdw sx="100000" sy="100000" kx="0" ky="0" algn="bl" rotWithShape="0" blurRad="101600" dist="25400" dir="8100000">
+            <a:outerShdw blurRad="101600" dist="25400" dir="8100000" algn="bl" rotWithShape="0">
               <a:srgbClr val="000000">
                 <a:alpha val="12000"/>
               </a:srgbClr>
             </a:outerShdw>
           </a:effectLst>
         </p:spPr>
+        <p:txBody>
+          <a:bodyPr/>
+          <a:lstStyle/>
+          <a:p>
+            <a:endParaRPr lang="en-US"/>
+          </a:p>
+        </p:txBody>
       </p:sp>
       <p:sp>
         <p:nvSpPr>
@@ -2236,6 +2427,13 @@
           </a:solidFill>
           <a:ln/>
         </p:spPr>
+        <p:txBody>
+          <a:bodyPr/>
+          <a:lstStyle/>
+          <a:p>
+            <a:endParaRPr lang="en-US"/>
+          </a:p>
+        </p:txBody>
       </p:sp>
       <p:sp>
         <p:nvSpPr>
@@ -2258,7 +2456,7 @@
           <a:bodyPr wrap="square" lIns="0" tIns="0" rIns="0" bIns="0" rtlCol="0" anchor="ctr"/>
           <a:lstStyle/>
           <a:p>
-            <a:pPr indent="0" marL="0">
+            <a:pPr marL="0" indent="0">
               <a:buNone/>
             </a:pPr>
             <a:r>
@@ -2297,7 +2495,7 @@
           <a:bodyPr wrap="square" lIns="0" tIns="0" rIns="0" bIns="0" rtlCol="0" anchor="t"/>
           <a:lstStyle/>
           <a:p>
-            <a:pPr indent="0" marL="0">
+            <a:pPr marL="0" indent="0">
               <a:spcAft>
                 <a:spcPts val="800"/>
               </a:spcAft>
@@ -2317,7 +2515,7 @@
             <a:endParaRPr lang="en-US" sz="1100" dirty="0"/>
           </a:p>
           <a:p>
-            <a:pPr indent="0" marL="0">
+            <a:pPr marL="0" indent="0">
               <a:spcAft>
                 <a:spcPts val="800"/>
               </a:spcAft>
@@ -2337,7 +2535,7 @@
             <a:endParaRPr lang="en-US" sz="1100" dirty="0"/>
           </a:p>
           <a:p>
-            <a:pPr indent="0" marL="0">
+            <a:pPr marL="0" indent="0">
               <a:spcAft>
                 <a:spcPts val="800"/>
               </a:spcAft>
@@ -2357,7 +2555,7 @@
             <a:endParaRPr lang="en-US" sz="1100" dirty="0"/>
           </a:p>
           <a:p>
-            <a:pPr indent="0" marL="0">
+            <a:pPr marL="0" indent="0">
               <a:spcAft>
                 <a:spcPts val="800"/>
               </a:spcAft>
@@ -2377,7 +2575,7 @@
             <a:endParaRPr lang="en-US" sz="1100" dirty="0"/>
           </a:p>
           <a:p>
-            <a:pPr indent="0" marL="0">
+            <a:pPr marL="0" indent="0">
               <a:spcAft>
                 <a:spcPts val="800"/>
               </a:spcAft>
@@ -2397,7 +2595,7 @@
             <a:endParaRPr lang="en-US" sz="1100" dirty="0"/>
           </a:p>
           <a:p>
-            <a:pPr indent="0" marL="0">
+            <a:pPr marL="0" indent="0">
               <a:spcAft>
                 <a:spcPts val="800"/>
               </a:spcAft>
@@ -2417,7 +2615,7 @@
             <a:endParaRPr lang="en-US" sz="1100" dirty="0"/>
           </a:p>
           <a:p>
-            <a:pPr indent="0" marL="0">
+            <a:pPr marL="0" indent="0">
               <a:spcAft>
                 <a:spcPts val="800"/>
               </a:spcAft>
@@ -2462,13 +2660,20 @@
             <a:prstDash val="solid"/>
           </a:ln>
           <a:effectLst>
-            <a:outerShdw sx="100000" sy="100000" kx="0" ky="0" algn="bl" rotWithShape="0" blurRad="101600" dist="25400" dir="8100000">
+            <a:outerShdw blurRad="101600" dist="25400" dir="8100000" algn="bl" rotWithShape="0">
               <a:srgbClr val="000000">
                 <a:alpha val="12000"/>
               </a:srgbClr>
             </a:outerShdw>
           </a:effectLst>
         </p:spPr>
+        <p:txBody>
+          <a:bodyPr/>
+          <a:lstStyle/>
+          <a:p>
+            <a:endParaRPr lang="en-US"/>
+          </a:p>
+        </p:txBody>
       </p:sp>
       <p:sp>
         <p:nvSpPr>
@@ -2489,6 +2694,13 @@
           </a:solidFill>
           <a:ln/>
         </p:spPr>
+        <p:txBody>
+          <a:bodyPr/>
+          <a:lstStyle/>
+          <a:p>
+            <a:endParaRPr lang="en-US"/>
+          </a:p>
+        </p:txBody>
       </p:sp>
       <p:sp>
         <p:nvSpPr>
@@ -2511,7 +2723,7 @@
           <a:bodyPr wrap="square" lIns="0" tIns="0" rIns="0" bIns="0" rtlCol="0" anchor="ctr"/>
           <a:lstStyle/>
           <a:p>
-            <a:pPr indent="0" marL="0">
+            <a:pPr marL="0" indent="0">
               <a:buNone/>
             </a:pPr>
             <a:r>
@@ -2550,7 +2762,7 @@
           <a:bodyPr wrap="square" lIns="0" tIns="0" rIns="0" bIns="0" rtlCol="0" anchor="ctr"/>
           <a:lstStyle/>
           <a:p>
-            <a:pPr indent="0" marL="0">
+            <a:pPr marL="0" indent="0">
               <a:spcAft>
                 <a:spcPts val="400"/>
               </a:spcAft>
@@ -2567,12 +2779,6 @@
               </a:rPr>
               <a:t>Due: </a:t>
             </a:r>
-            <a:pPr indent="0" marL="0">
-              <a:spcAft>
-                <a:spcPts val="400"/>
-              </a:spcAft>
-              <a:buNone/>
-            </a:pPr>
             <a:r>
               <a:rPr lang="en-US" sz="1100" dirty="0">
                 <a:solidFill>
@@ -2585,12 +2791,6 @@
               <a:t>Beginning of Week 2
 </a:t>
             </a:r>
-            <a:pPr indent="0" marL="0">
-              <a:spcAft>
-                <a:spcPts val="400"/>
-              </a:spcAft>
-              <a:buNone/>
-            </a:pPr>
             <a:r>
               <a:rPr lang="en-US" sz="1100" b="1" dirty="0">
                 <a:solidFill>
@@ -2602,12 +2802,6 @@
               </a:rPr>
               <a:t>Where: </a:t>
             </a:r>
-            <a:pPr indent="0" marL="0">
-              <a:spcAft>
-                <a:spcPts val="400"/>
-              </a:spcAft>
-              <a:buNone/>
-            </a:pPr>
             <a:r>
               <a:rPr lang="en-US" sz="1100" dirty="0">
                 <a:solidFill>
@@ -2620,12 +2814,6 @@
               <a:t>Learning Management System (Canvas)
 </a:t>
             </a:r>
-            <a:pPr indent="0" marL="0">
-              <a:spcAft>
-                <a:spcPts val="400"/>
-              </a:spcAft>
-              <a:buNone/>
-            </a:pPr>
             <a:r>
               <a:rPr lang="en-US" sz="1100" b="1" dirty="0">
                 <a:solidFill>
@@ -2637,12 +2825,6 @@
               </a:rPr>
               <a:t>Points: </a:t>
             </a:r>
-            <a:pPr indent="0" marL="0">
-              <a:spcAft>
-                <a:spcPts val="400"/>
-              </a:spcAft>
-              <a:buNone/>
-            </a:pPr>
             <a:r>
               <a:rPr lang="en-US" sz="1100" dirty="0">
                 <a:solidFill>
@@ -2682,13 +2864,20 @@
             <a:prstDash val="solid"/>
           </a:ln>
           <a:effectLst>
-            <a:outerShdw sx="100000" sy="100000" kx="0" ky="0" algn="bl" rotWithShape="0" blurRad="101600" dist="25400" dir="8100000">
+            <a:outerShdw blurRad="101600" dist="25400" dir="8100000" algn="bl" rotWithShape="0">
               <a:srgbClr val="000000">
                 <a:alpha val="12000"/>
               </a:srgbClr>
             </a:outerShdw>
           </a:effectLst>
         </p:spPr>
+        <p:txBody>
+          <a:bodyPr/>
+          <a:lstStyle/>
+          <a:p>
+            <a:endParaRPr lang="en-US"/>
+          </a:p>
+        </p:txBody>
       </p:sp>
       <p:sp>
         <p:nvSpPr>
@@ -2709,6 +2898,13 @@
           </a:solidFill>
           <a:ln/>
         </p:spPr>
+        <p:txBody>
+          <a:bodyPr/>
+          <a:lstStyle/>
+          <a:p>
+            <a:endParaRPr lang="en-US"/>
+          </a:p>
+        </p:txBody>
       </p:sp>
       <p:sp>
         <p:nvSpPr>
@@ -2731,7 +2927,7 @@
           <a:bodyPr wrap="square" lIns="0" tIns="0" rIns="0" bIns="0" rtlCol="0" anchor="ctr"/>
           <a:lstStyle/>
           <a:p>
-            <a:pPr indent="0" marL="0">
+            <a:pPr marL="0" indent="0">
               <a:buNone/>
             </a:pPr>
             <a:r>
@@ -2876,7 +3072,7 @@
           <a:bodyPr wrap="square" lIns="0" tIns="0" rIns="0" bIns="0" rtlCol="0" anchor="ctr"/>
           <a:lstStyle/>
           <a:p>
-            <a:pPr algn="r" indent="0" marL="0">
+            <a:pPr marL="0" indent="0" algn="r">
               <a:buNone/>
             </a:pPr>
             <a:r>
@@ -2910,6 +3106,7 @@
         <a:solidFill>
           <a:srgbClr val="1F3864"/>
         </a:solidFill>
+        <a:effectLst/>
       </p:bgPr>
     </p:bg>
     <p:spTree>
@@ -2945,6 +3142,13 @@
           </a:solidFill>
           <a:ln/>
         </p:spPr>
+        <p:txBody>
+          <a:bodyPr/>
+          <a:lstStyle/>
+          <a:p>
+            <a:endParaRPr lang="en-US"/>
+          </a:p>
+        </p:txBody>
       </p:sp>
       <p:sp>
         <p:nvSpPr>
@@ -2965,6 +3169,13 @@
           </a:solidFill>
           <a:ln/>
         </p:spPr>
+        <p:txBody>
+          <a:bodyPr/>
+          <a:lstStyle/>
+          <a:p>
+            <a:endParaRPr lang="en-US"/>
+          </a:p>
+        </p:txBody>
       </p:sp>
       <p:sp>
         <p:nvSpPr>
@@ -2985,6 +3196,13 @@
           </a:solidFill>
           <a:ln/>
         </p:spPr>
+        <p:txBody>
+          <a:bodyPr/>
+          <a:lstStyle/>
+          <a:p>
+            <a:endParaRPr lang="en-US"/>
+          </a:p>
+        </p:txBody>
       </p:sp>
       <p:sp>
         <p:nvSpPr>
@@ -3007,11 +3225,11 @@
           <a:bodyPr wrap="square" lIns="0" tIns="0" rIns="0" bIns="0" rtlCol="0" anchor="ctr"/>
           <a:lstStyle/>
           <a:p>
-            <a:pPr indent="0" marL="0">
-              <a:buNone/>
-            </a:pPr>
-            <a:r>
-              <a:rPr lang="en-US" sz="1100" spc="300" kern="0" dirty="0">
+            <a:pPr marL="0" indent="0">
+              <a:buNone/>
+            </a:pPr>
+            <a:r>
+              <a:rPr lang="en-US" sz="1100" kern="0" spc="300" dirty="0">
                 <a:solidFill>
                   <a:srgbClr val="BDD7EE"/>
                 </a:solidFill>
@@ -3046,7 +3264,7 @@
           <a:bodyPr wrap="square" lIns="0" tIns="0" rIns="0" bIns="0" rtlCol="0" anchor="ctr"/>
           <a:lstStyle/>
           <a:p>
-            <a:pPr indent="0" marL="0">
+            <a:pPr marL="0" indent="0">
               <a:buNone/>
             </a:pPr>
             <a:r>
@@ -3215,6 +3433,13 @@
             <a:prstDash val="solid"/>
           </a:ln>
         </p:spPr>
+        <p:txBody>
+          <a:bodyPr/>
+          <a:lstStyle/>
+          <a:p>
+            <a:endParaRPr lang="en-US"/>
+          </a:p>
+        </p:txBody>
       </p:sp>
       <p:sp>
         <p:nvSpPr>
@@ -3237,7 +3462,7 @@
           <a:bodyPr wrap="square" lIns="0" tIns="0" rIns="0" bIns="0" rtlCol="0" anchor="ctr"/>
           <a:lstStyle/>
           <a:p>
-            <a:pPr indent="0" marL="0">
+            <a:pPr marL="0" indent="0">
               <a:buNone/>
             </a:pPr>
             <a:r>
@@ -3276,7 +3501,7 @@
           <a:bodyPr wrap="square" lIns="0" tIns="0" rIns="0" bIns="0" rtlCol="0" anchor="ctr"/>
           <a:lstStyle/>
           <a:p>
-            <a:pPr indent="0" marL="0">
+            <a:pPr marL="0" indent="0">
               <a:buNone/>
             </a:pPr>
             <a:r>
@@ -3315,7 +3540,7 @@
           <a:bodyPr wrap="square" lIns="0" tIns="0" rIns="0" bIns="0" rtlCol="0" anchor="ctr"/>
           <a:lstStyle/>
           <a:p>
-            <a:pPr indent="0" marL="0">
+            <a:pPr marL="0" indent="0">
               <a:buNone/>
             </a:pPr>
             <a:r>
@@ -3335,14 +3560,14 @@
       </p:sp>
       <p:pic>
         <p:nvPicPr>
-          <p:cNvPr id="12" name="Image 0" descr="preencoded.png">    </p:cNvPr>
+          <p:cNvPr id="12" name="Image 0" descr="preencoded.png"/>
           <p:cNvPicPr>
             <a:picLocks noChangeAspect="1"/>
           </p:cNvPicPr>
           <p:nvPr/>
         </p:nvPicPr>
         <p:blipFill>
-          <a:blip r:embed="rId1">
+          <a:blip r:embed="rId3">
             <a:alphaModFix amt="60000"/>
           </a:blip>
           <a:stretch>
@@ -3380,7 +3605,7 @@
           <a:bodyPr wrap="square" lIns="0" tIns="0" rIns="0" bIns="0" rtlCol="0" anchor="ctr"/>
           <a:lstStyle/>
           <a:p>
-            <a:pPr algn="ctr" indent="0" marL="0">
+            <a:pPr marL="0" indent="0" algn="ctr">
               <a:buNone/>
             </a:pPr>
             <a:r>
@@ -3419,20 +3644,9 @@
           <a:bodyPr wrap="square" lIns="0" tIns="0" rIns="0" bIns="0" rtlCol="0" anchor="ctr"/>
           <a:lstStyle/>
           <a:p>
-            <a:pPr algn="ctr" indent="0" marL="0">
-              <a:buNone/>
-            </a:pPr>
-            <a:r>
-              <a:rPr lang="en-US" sz="1000" i="1" dirty="0">
-                <a:solidFill>
-                  <a:srgbClr val="8BACD4"/>
-                </a:solidFill>
-                <a:latin typeface="Calibri" pitchFamily="34" charset="0"/>
-                <a:ea typeface="Calibri" pitchFamily="34" charset="-122"/>
-                <a:cs typeface="Calibri" pitchFamily="34" charset="-120"/>
-              </a:rPr>
-              <a:t>sebastian.hayes@cyberjousting.com</a:t>
-            </a:r>
+            <a:pPr marL="0" indent="0" algn="ctr">
+              <a:buNone/>
+            </a:pPr>
             <a:endParaRPr lang="en-US" sz="1000" dirty="0"/>
           </a:p>
         </p:txBody>
@@ -3458,7 +3672,7 @@
           <a:bodyPr wrap="square" lIns="0" tIns="0" rIns="0" bIns="0" rtlCol="0" anchor="ctr"/>
           <a:lstStyle/>
           <a:p>
-            <a:pPr algn="r" indent="0" marL="0">
+            <a:pPr marL="0" indent="0" algn="r">
               <a:buNone/>
             </a:pPr>
             <a:r>
@@ -3492,6 +3706,7 @@
         <a:solidFill>
           <a:srgbClr val="F5F8FC"/>
         </a:solidFill>
+        <a:effectLst/>
       </p:bgPr>
     </p:bg>
     <p:spTree>
@@ -3532,6 +3747,13 @@
             <a:prstDash val="solid"/>
           </a:ln>
         </p:spPr>
+        <p:txBody>
+          <a:bodyPr/>
+          <a:lstStyle/>
+          <a:p>
+            <a:endParaRPr lang="en-US"/>
+          </a:p>
+        </p:txBody>
       </p:sp>
       <p:sp>
         <p:nvSpPr>
@@ -3554,7 +3776,7 @@
           <a:bodyPr wrap="square" lIns="0" tIns="0" rIns="0" bIns="0" rtlCol="0" anchor="ctr"/>
           <a:lstStyle/>
           <a:p>
-            <a:pPr indent="0" marL="0">
+            <a:pPr marL="0" indent="0">
               <a:buNone/>
             </a:pPr>
             <a:r>
@@ -3596,6 +3818,13 @@
             <a:prstDash val="solid"/>
           </a:ln>
         </p:spPr>
+        <p:txBody>
+          <a:bodyPr/>
+          <a:lstStyle/>
+          <a:p>
+            <a:endParaRPr lang="en-US"/>
+          </a:p>
+        </p:txBody>
       </p:sp>
       <p:sp>
         <p:nvSpPr>
@@ -3621,13 +3850,20 @@
             <a:prstDash val="solid"/>
           </a:ln>
           <a:effectLst>
-            <a:outerShdw sx="100000" sy="100000" kx="0" ky="0" algn="bl" rotWithShape="0" blurRad="101600" dist="25400" dir="8100000">
+            <a:outerShdw blurRad="101600" dist="25400" dir="8100000" algn="bl" rotWithShape="0">
               <a:srgbClr val="000000">
                 <a:alpha val="12000"/>
               </a:srgbClr>
             </a:outerShdw>
           </a:effectLst>
         </p:spPr>
+        <p:txBody>
+          <a:bodyPr/>
+          <a:lstStyle/>
+          <a:p>
+            <a:endParaRPr lang="en-US"/>
+          </a:p>
+        </p:txBody>
       </p:sp>
       <p:sp>
         <p:nvSpPr>
@@ -3648,6 +3884,13 @@
           </a:solidFill>
           <a:ln/>
         </p:spPr>
+        <p:txBody>
+          <a:bodyPr/>
+          <a:lstStyle/>
+          <a:p>
+            <a:endParaRPr lang="en-US"/>
+          </a:p>
+        </p:txBody>
       </p:sp>
       <p:sp>
         <p:nvSpPr>
@@ -3670,7 +3913,7 @@
           <a:bodyPr wrap="square" lIns="0" tIns="0" rIns="0" bIns="0" rtlCol="0" anchor="ctr"/>
           <a:lstStyle/>
           <a:p>
-            <a:pPr algn="ctr" indent="0" marL="0">
+            <a:pPr marL="0" indent="0" algn="ctr">
               <a:buNone/>
             </a:pPr>
             <a:r>
@@ -3687,14 +3930,14 @@
       </p:sp>
       <p:pic>
         <p:nvPicPr>
-          <p:cNvPr id="8" name="Image 0" descr="preencoded.png">    </p:cNvPr>
+          <p:cNvPr id="8" name="Image 0" descr="preencoded.png"/>
           <p:cNvPicPr>
             <a:picLocks noChangeAspect="1"/>
           </p:cNvPicPr>
           <p:nvPr/>
         </p:nvPicPr>
         <p:blipFill>
-          <a:blip r:embed="rId1"/>
+          <a:blip r:embed="rId3"/>
           <a:stretch>
             <a:fillRect/>
           </a:stretch>
@@ -3730,7 +3973,7 @@
           <a:bodyPr wrap="square" lIns="0" tIns="0" rIns="0" bIns="0" rtlCol="0" anchor="ctr"/>
           <a:lstStyle/>
           <a:p>
-            <a:pPr indent="0" marL="0">
+            <a:pPr marL="0" indent="0">
               <a:buNone/>
             </a:pPr>
             <a:r>
@@ -3747,7 +3990,7 @@
             <a:endParaRPr lang="en-US" sz="1300" dirty="0"/>
           </a:p>
           <a:p>
-            <a:pPr indent="0" marL="0">
+            <a:pPr marL="0" indent="0">
               <a:buNone/>
             </a:pPr>
             <a:r>
@@ -3789,13 +4032,20 @@
             <a:prstDash val="solid"/>
           </a:ln>
           <a:effectLst>
-            <a:outerShdw sx="100000" sy="100000" kx="0" ky="0" algn="bl" rotWithShape="0" blurRad="101600" dist="25400" dir="8100000">
+            <a:outerShdw blurRad="101600" dist="25400" dir="8100000" algn="bl" rotWithShape="0">
               <a:srgbClr val="000000">
                 <a:alpha val="12000"/>
               </a:srgbClr>
             </a:outerShdw>
           </a:effectLst>
         </p:spPr>
+        <p:txBody>
+          <a:bodyPr/>
+          <a:lstStyle/>
+          <a:p>
+            <a:endParaRPr lang="en-US"/>
+          </a:p>
+        </p:txBody>
       </p:sp>
       <p:sp>
         <p:nvSpPr>
@@ -3816,6 +4066,13 @@
           </a:solidFill>
           <a:ln/>
         </p:spPr>
+        <p:txBody>
+          <a:bodyPr/>
+          <a:lstStyle/>
+          <a:p>
+            <a:endParaRPr lang="en-US"/>
+          </a:p>
+        </p:txBody>
       </p:sp>
       <p:sp>
         <p:nvSpPr>
@@ -3838,7 +4095,7 @@
           <a:bodyPr wrap="square" lIns="0" tIns="0" rIns="0" bIns="0" rtlCol="0" anchor="ctr"/>
           <a:lstStyle/>
           <a:p>
-            <a:pPr algn="ctr" indent="0" marL="0">
+            <a:pPr marL="0" indent="0" algn="ctr">
               <a:buNone/>
             </a:pPr>
             <a:r>
@@ -3855,14 +4112,14 @@
       </p:sp>
       <p:pic>
         <p:nvPicPr>
-          <p:cNvPr id="13" name="Image 1" descr="preencoded.png">    </p:cNvPr>
+          <p:cNvPr id="13" name="Image 1" descr="preencoded.png"/>
           <p:cNvPicPr>
             <a:picLocks noChangeAspect="1"/>
           </p:cNvPicPr>
           <p:nvPr/>
         </p:nvPicPr>
         <p:blipFill>
-          <a:blip r:embed="rId2"/>
+          <a:blip r:embed="rId4"/>
           <a:stretch>
             <a:fillRect/>
           </a:stretch>
@@ -3898,7 +4155,7 @@
           <a:bodyPr wrap="square" lIns="0" tIns="0" rIns="0" bIns="0" rtlCol="0" anchor="ctr"/>
           <a:lstStyle/>
           <a:p>
-            <a:pPr indent="0" marL="0">
+            <a:pPr marL="0" indent="0">
               <a:buNone/>
             </a:pPr>
             <a:r>
@@ -3915,7 +4172,7 @@
             <a:endParaRPr lang="en-US" sz="1300" dirty="0"/>
           </a:p>
           <a:p>
-            <a:pPr indent="0" marL="0">
+            <a:pPr marL="0" indent="0">
               <a:buNone/>
             </a:pPr>
             <a:r>
@@ -3957,13 +4214,20 @@
             <a:prstDash val="solid"/>
           </a:ln>
           <a:effectLst>
-            <a:outerShdw sx="100000" sy="100000" kx="0" ky="0" algn="bl" rotWithShape="0" blurRad="101600" dist="25400" dir="8100000">
+            <a:outerShdw blurRad="101600" dist="25400" dir="8100000" algn="bl" rotWithShape="0">
               <a:srgbClr val="000000">
                 <a:alpha val="12000"/>
               </a:srgbClr>
             </a:outerShdw>
           </a:effectLst>
         </p:spPr>
+        <p:txBody>
+          <a:bodyPr/>
+          <a:lstStyle/>
+          <a:p>
+            <a:endParaRPr lang="en-US"/>
+          </a:p>
+        </p:txBody>
       </p:sp>
       <p:sp>
         <p:nvSpPr>
@@ -3984,6 +4248,13 @@
           </a:solidFill>
           <a:ln/>
         </p:spPr>
+        <p:txBody>
+          <a:bodyPr/>
+          <a:lstStyle/>
+          <a:p>
+            <a:endParaRPr lang="en-US"/>
+          </a:p>
+        </p:txBody>
       </p:sp>
       <p:sp>
         <p:nvSpPr>
@@ -4006,7 +4277,7 @@
           <a:bodyPr wrap="square" lIns="0" tIns="0" rIns="0" bIns="0" rtlCol="0" anchor="ctr"/>
           <a:lstStyle/>
           <a:p>
-            <a:pPr algn="ctr" indent="0" marL="0">
+            <a:pPr marL="0" indent="0" algn="ctr">
               <a:buNone/>
             </a:pPr>
             <a:r>
@@ -4023,14 +4294,14 @@
       </p:sp>
       <p:pic>
         <p:nvPicPr>
-          <p:cNvPr id="18" name="Image 2" descr="preencoded.png">    </p:cNvPr>
+          <p:cNvPr id="18" name="Image 2" descr="preencoded.png"/>
           <p:cNvPicPr>
             <a:picLocks noChangeAspect="1"/>
           </p:cNvPicPr>
           <p:nvPr/>
         </p:nvPicPr>
         <p:blipFill>
-          <a:blip r:embed="rId3"/>
+          <a:blip r:embed="rId5"/>
           <a:stretch>
             <a:fillRect/>
           </a:stretch>
@@ -4066,7 +4337,7 @@
           <a:bodyPr wrap="square" lIns="0" tIns="0" rIns="0" bIns="0" rtlCol="0" anchor="ctr"/>
           <a:lstStyle/>
           <a:p>
-            <a:pPr indent="0" marL="0">
+            <a:pPr marL="0" indent="0">
               <a:buNone/>
             </a:pPr>
             <a:r>
@@ -4083,7 +4354,7 @@
             <a:endParaRPr lang="en-US" sz="1300" dirty="0"/>
           </a:p>
           <a:p>
-            <a:pPr indent="0" marL="0">
+            <a:pPr marL="0" indent="0">
               <a:buNone/>
             </a:pPr>
             <a:r>
@@ -4125,13 +4396,20 @@
             <a:prstDash val="solid"/>
           </a:ln>
           <a:effectLst>
-            <a:outerShdw sx="100000" sy="100000" kx="0" ky="0" algn="bl" rotWithShape="0" blurRad="101600" dist="25400" dir="8100000">
+            <a:outerShdw blurRad="101600" dist="25400" dir="8100000" algn="bl" rotWithShape="0">
               <a:srgbClr val="000000">
                 <a:alpha val="12000"/>
               </a:srgbClr>
             </a:outerShdw>
           </a:effectLst>
         </p:spPr>
+        <p:txBody>
+          <a:bodyPr/>
+          <a:lstStyle/>
+          <a:p>
+            <a:endParaRPr lang="en-US"/>
+          </a:p>
+        </p:txBody>
       </p:sp>
       <p:sp>
         <p:nvSpPr>
@@ -4152,6 +4430,13 @@
           </a:solidFill>
           <a:ln/>
         </p:spPr>
+        <p:txBody>
+          <a:bodyPr/>
+          <a:lstStyle/>
+          <a:p>
+            <a:endParaRPr lang="en-US"/>
+          </a:p>
+        </p:txBody>
       </p:sp>
       <p:sp>
         <p:nvSpPr>
@@ -4174,7 +4459,7 @@
           <a:bodyPr wrap="square" lIns="0" tIns="0" rIns="0" bIns="0" rtlCol="0" anchor="ctr"/>
           <a:lstStyle/>
           <a:p>
-            <a:pPr algn="ctr" indent="0" marL="0">
+            <a:pPr marL="0" indent="0" algn="ctr">
               <a:buNone/>
             </a:pPr>
             <a:r>
@@ -4191,14 +4476,14 @@
       </p:sp>
       <p:pic>
         <p:nvPicPr>
-          <p:cNvPr id="23" name="Image 3" descr="preencoded.png">    </p:cNvPr>
+          <p:cNvPr id="23" name="Image 3" descr="preencoded.png"/>
           <p:cNvPicPr>
             <a:picLocks noChangeAspect="1"/>
           </p:cNvPicPr>
           <p:nvPr/>
         </p:nvPicPr>
         <p:blipFill>
-          <a:blip r:embed="rId4"/>
+          <a:blip r:embed="rId6"/>
           <a:stretch>
             <a:fillRect/>
           </a:stretch>
@@ -4234,7 +4519,7 @@
           <a:bodyPr wrap="square" lIns="0" tIns="0" rIns="0" bIns="0" rtlCol="0" anchor="ctr"/>
           <a:lstStyle/>
           <a:p>
-            <a:pPr indent="0" marL="0">
+            <a:pPr marL="0" indent="0">
               <a:buNone/>
             </a:pPr>
             <a:r>
@@ -4251,7 +4536,7 @@
             <a:endParaRPr lang="en-US" sz="1300" dirty="0"/>
           </a:p>
           <a:p>
-            <a:pPr indent="0" marL="0">
+            <a:pPr marL="0" indent="0">
               <a:buNone/>
             </a:pPr>
             <a:r>
@@ -4293,13 +4578,20 @@
             <a:prstDash val="solid"/>
           </a:ln>
           <a:effectLst>
-            <a:outerShdw sx="100000" sy="100000" kx="0" ky="0" algn="bl" rotWithShape="0" blurRad="101600" dist="25400" dir="8100000">
+            <a:outerShdw blurRad="101600" dist="25400" dir="8100000" algn="bl" rotWithShape="0">
               <a:srgbClr val="000000">
                 <a:alpha val="12000"/>
               </a:srgbClr>
             </a:outerShdw>
           </a:effectLst>
         </p:spPr>
+        <p:txBody>
+          <a:bodyPr/>
+          <a:lstStyle/>
+          <a:p>
+            <a:endParaRPr lang="en-US"/>
+          </a:p>
+        </p:txBody>
       </p:sp>
       <p:sp>
         <p:nvSpPr>
@@ -4320,6 +4612,13 @@
           </a:solidFill>
           <a:ln/>
         </p:spPr>
+        <p:txBody>
+          <a:bodyPr/>
+          <a:lstStyle/>
+          <a:p>
+            <a:endParaRPr lang="en-US"/>
+          </a:p>
+        </p:txBody>
       </p:sp>
       <p:sp>
         <p:nvSpPr>
@@ -4342,7 +4641,7 @@
           <a:bodyPr wrap="square" lIns="0" tIns="0" rIns="0" bIns="0" rtlCol="0" anchor="ctr"/>
           <a:lstStyle/>
           <a:p>
-            <a:pPr algn="ctr" indent="0" marL="0">
+            <a:pPr marL="0" indent="0" algn="ctr">
               <a:buNone/>
             </a:pPr>
             <a:r>
@@ -4359,14 +4658,14 @@
       </p:sp>
       <p:pic>
         <p:nvPicPr>
-          <p:cNvPr id="28" name="Image 4" descr="preencoded.png">    </p:cNvPr>
+          <p:cNvPr id="28" name="Image 4" descr="preencoded.png"/>
           <p:cNvPicPr>
             <a:picLocks noChangeAspect="1"/>
           </p:cNvPicPr>
           <p:nvPr/>
         </p:nvPicPr>
         <p:blipFill>
-          <a:blip r:embed="rId5"/>
+          <a:blip r:embed="rId7"/>
           <a:stretch>
             <a:fillRect/>
           </a:stretch>
@@ -4402,7 +4701,7 @@
           <a:bodyPr wrap="square" lIns="0" tIns="0" rIns="0" bIns="0" rtlCol="0" anchor="ctr"/>
           <a:lstStyle/>
           <a:p>
-            <a:pPr indent="0" marL="0">
+            <a:pPr marL="0" indent="0">
               <a:buNone/>
             </a:pPr>
             <a:r>
@@ -4419,7 +4718,7 @@
             <a:endParaRPr lang="en-US" sz="1300" dirty="0"/>
           </a:p>
           <a:p>
-            <a:pPr indent="0" marL="0">
+            <a:pPr marL="0" indent="0">
               <a:buNone/>
             </a:pPr>
             <a:r>
@@ -4461,13 +4760,20 @@
             <a:prstDash val="solid"/>
           </a:ln>
           <a:effectLst>
-            <a:outerShdw sx="100000" sy="100000" kx="0" ky="0" algn="bl" rotWithShape="0" blurRad="101600" dist="25400" dir="8100000">
+            <a:outerShdw blurRad="101600" dist="25400" dir="8100000" algn="bl" rotWithShape="0">
               <a:srgbClr val="000000">
                 <a:alpha val="12000"/>
               </a:srgbClr>
             </a:outerShdw>
           </a:effectLst>
         </p:spPr>
+        <p:txBody>
+          <a:bodyPr/>
+          <a:lstStyle/>
+          <a:p>
+            <a:endParaRPr lang="en-US"/>
+          </a:p>
+        </p:txBody>
       </p:sp>
       <p:sp>
         <p:nvSpPr>
@@ -4488,6 +4794,13 @@
           </a:solidFill>
           <a:ln/>
         </p:spPr>
+        <p:txBody>
+          <a:bodyPr/>
+          <a:lstStyle/>
+          <a:p>
+            <a:endParaRPr lang="en-US"/>
+          </a:p>
+        </p:txBody>
       </p:sp>
       <p:sp>
         <p:nvSpPr>
@@ -4510,7 +4823,7 @@
           <a:bodyPr wrap="square" lIns="0" tIns="0" rIns="0" bIns="0" rtlCol="0" anchor="ctr"/>
           <a:lstStyle/>
           <a:p>
-            <a:pPr algn="ctr" indent="0" marL="0">
+            <a:pPr marL="0" indent="0" algn="ctr">
               <a:buNone/>
             </a:pPr>
             <a:r>
@@ -4527,14 +4840,14 @@
       </p:sp>
       <p:pic>
         <p:nvPicPr>
-          <p:cNvPr id="33" name="Image 5" descr="preencoded.png">    </p:cNvPr>
+          <p:cNvPr id="33" name="Image 5" descr="preencoded.png"/>
           <p:cNvPicPr>
             <a:picLocks noChangeAspect="1"/>
           </p:cNvPicPr>
           <p:nvPr/>
         </p:nvPicPr>
         <p:blipFill>
-          <a:blip r:embed="rId6"/>
+          <a:blip r:embed="rId8"/>
           <a:stretch>
             <a:fillRect/>
           </a:stretch>
@@ -4570,7 +4883,7 @@
           <a:bodyPr wrap="square" lIns="0" tIns="0" rIns="0" bIns="0" rtlCol="0" anchor="ctr"/>
           <a:lstStyle/>
           <a:p>
-            <a:pPr indent="0" marL="0">
+            <a:pPr marL="0" indent="0">
               <a:buNone/>
             </a:pPr>
             <a:r>
@@ -4587,7 +4900,7 @@
             <a:endParaRPr lang="en-US" sz="1300" dirty="0"/>
           </a:p>
           <a:p>
-            <a:pPr indent="0" marL="0">
+            <a:pPr marL="0" indent="0">
               <a:buNone/>
             </a:pPr>
             <a:r>
@@ -4626,7 +4939,7 @@
           <a:bodyPr wrap="square" lIns="0" tIns="0" rIns="0" bIns="0" rtlCol="0" anchor="ctr"/>
           <a:lstStyle/>
           <a:p>
-            <a:pPr algn="r" indent="0" marL="0">
+            <a:pPr marL="0" indent="0" algn="r">
               <a:buNone/>
             </a:pPr>
             <a:r>
@@ -4660,6 +4973,7 @@
         <a:solidFill>
           <a:srgbClr val="FFFFFF"/>
         </a:solidFill>
+        <a:effectLst/>
       </p:bgPr>
     </p:bg>
     <p:spTree>
@@ -4700,6 +5014,13 @@
             <a:prstDash val="solid"/>
           </a:ln>
         </p:spPr>
+        <p:txBody>
+          <a:bodyPr/>
+          <a:lstStyle/>
+          <a:p>
+            <a:endParaRPr lang="en-US"/>
+          </a:p>
+        </p:txBody>
       </p:sp>
       <p:sp>
         <p:nvSpPr>
@@ -4722,7 +5043,7 @@
           <a:bodyPr wrap="square" lIns="0" tIns="0" rIns="0" bIns="0" rtlCol="0" anchor="ctr"/>
           <a:lstStyle/>
           <a:p>
-            <a:pPr indent="0" marL="0">
+            <a:pPr marL="0" indent="0">
               <a:buNone/>
             </a:pPr>
             <a:r>
@@ -4764,6 +5085,13 @@
             <a:prstDash val="solid"/>
           </a:ln>
         </p:spPr>
+        <p:txBody>
+          <a:bodyPr/>
+          <a:lstStyle/>
+          <a:p>
+            <a:endParaRPr lang="en-US"/>
+          </a:p>
+        </p:txBody>
       </p:sp>
       <p:sp>
         <p:nvSpPr>
@@ -4789,13 +5117,20 @@
             <a:prstDash val="solid"/>
           </a:ln>
           <a:effectLst>
-            <a:outerShdw sx="100000" sy="100000" kx="0" ky="0" algn="bl" rotWithShape="0" blurRad="101600" dist="25400" dir="8100000">
+            <a:outerShdw blurRad="101600" dist="25400" dir="8100000" algn="bl" rotWithShape="0">
               <a:srgbClr val="000000">
                 <a:alpha val="12000"/>
               </a:srgbClr>
             </a:outerShdw>
           </a:effectLst>
         </p:spPr>
+        <p:txBody>
+          <a:bodyPr/>
+          <a:lstStyle/>
+          <a:p>
+            <a:endParaRPr lang="en-US"/>
+          </a:p>
+        </p:txBody>
       </p:sp>
       <p:sp>
         <p:nvSpPr>
@@ -4816,6 +5151,13 @@
           </a:solidFill>
           <a:ln/>
         </p:spPr>
+        <p:txBody>
+          <a:bodyPr/>
+          <a:lstStyle/>
+          <a:p>
+            <a:endParaRPr lang="en-US"/>
+          </a:p>
+        </p:txBody>
       </p:sp>
       <p:sp>
         <p:nvSpPr>
@@ -4838,7 +5180,7 @@
           <a:bodyPr wrap="square" lIns="0" tIns="0" rIns="0" bIns="0" rtlCol="0" anchor="ctr"/>
           <a:lstStyle/>
           <a:p>
-            <a:pPr algn="ctr" indent="0" marL="0">
+            <a:pPr marL="0" indent="0" algn="ctr">
               <a:buNone/>
             </a:pPr>
             <a:r>
@@ -4877,7 +5219,7 @@
           <a:bodyPr wrap="square" lIns="0" tIns="0" rIns="0" bIns="0" rtlCol="0" anchor="ctr"/>
           <a:lstStyle/>
           <a:p>
-            <a:pPr algn="ctr" indent="0" marL="0">
+            <a:pPr marL="0" indent="0" algn="ctr">
               <a:buNone/>
             </a:pPr>
             <a:r>
@@ -4919,13 +5261,20 @@
             <a:prstDash val="solid"/>
           </a:ln>
           <a:effectLst>
-            <a:outerShdw sx="100000" sy="100000" kx="0" ky="0" algn="bl" rotWithShape="0" blurRad="101600" dist="25400" dir="8100000">
+            <a:outerShdw blurRad="101600" dist="25400" dir="8100000" algn="bl" rotWithShape="0">
               <a:srgbClr val="000000">
                 <a:alpha val="12000"/>
               </a:srgbClr>
             </a:outerShdw>
           </a:effectLst>
         </p:spPr>
+        <p:txBody>
+          <a:bodyPr/>
+          <a:lstStyle/>
+          <a:p>
+            <a:endParaRPr lang="en-US"/>
+          </a:p>
+        </p:txBody>
       </p:sp>
       <p:sp>
         <p:nvSpPr>
@@ -4946,6 +5295,13 @@
           </a:solidFill>
           <a:ln/>
         </p:spPr>
+        <p:txBody>
+          <a:bodyPr/>
+          <a:lstStyle/>
+          <a:p>
+            <a:endParaRPr lang="en-US"/>
+          </a:p>
+        </p:txBody>
       </p:sp>
       <p:sp>
         <p:nvSpPr>
@@ -4968,7 +5324,7 @@
           <a:bodyPr wrap="square" lIns="0" tIns="0" rIns="0" bIns="0" rtlCol="0" anchor="ctr"/>
           <a:lstStyle/>
           <a:p>
-            <a:pPr algn="ctr" indent="0" marL="0">
+            <a:pPr marL="0" indent="0" algn="ctr">
               <a:buNone/>
             </a:pPr>
             <a:r>
@@ -5007,7 +5363,7 @@
           <a:bodyPr wrap="square" lIns="0" tIns="0" rIns="0" bIns="0" rtlCol="0" anchor="ctr"/>
           <a:lstStyle/>
           <a:p>
-            <a:pPr algn="ctr" indent="0" marL="0">
+            <a:pPr marL="0" indent="0" algn="ctr">
               <a:buNone/>
             </a:pPr>
             <a:r>
@@ -5049,13 +5405,20 @@
             <a:prstDash val="solid"/>
           </a:ln>
           <a:effectLst>
-            <a:outerShdw sx="100000" sy="100000" kx="0" ky="0" algn="bl" rotWithShape="0" blurRad="101600" dist="25400" dir="8100000">
+            <a:outerShdw blurRad="101600" dist="25400" dir="8100000" algn="bl" rotWithShape="0">
               <a:srgbClr val="000000">
                 <a:alpha val="12000"/>
               </a:srgbClr>
             </a:outerShdw>
           </a:effectLst>
         </p:spPr>
+        <p:txBody>
+          <a:bodyPr/>
+          <a:lstStyle/>
+          <a:p>
+            <a:endParaRPr lang="en-US"/>
+          </a:p>
+        </p:txBody>
       </p:sp>
       <p:sp>
         <p:nvSpPr>
@@ -5076,6 +5439,13 @@
           </a:solidFill>
           <a:ln/>
         </p:spPr>
+        <p:txBody>
+          <a:bodyPr/>
+          <a:lstStyle/>
+          <a:p>
+            <a:endParaRPr lang="en-US"/>
+          </a:p>
+        </p:txBody>
       </p:sp>
       <p:sp>
         <p:nvSpPr>
@@ -5098,7 +5468,7 @@
           <a:bodyPr wrap="square" lIns="0" tIns="0" rIns="0" bIns="0" rtlCol="0" anchor="ctr"/>
           <a:lstStyle/>
           <a:p>
-            <a:pPr algn="ctr" indent="0" marL="0">
+            <a:pPr marL="0" indent="0" algn="ctr">
               <a:buNone/>
             </a:pPr>
             <a:r>
@@ -5137,7 +5507,7 @@
           <a:bodyPr wrap="square" lIns="0" tIns="0" rIns="0" bIns="0" rtlCol="0" anchor="ctr"/>
           <a:lstStyle/>
           <a:p>
-            <a:pPr algn="ctr" indent="0" marL="0">
+            <a:pPr marL="0" indent="0" algn="ctr">
               <a:buNone/>
             </a:pPr>
             <a:r>
@@ -5176,7 +5546,7 @@
           <a:bodyPr wrap="square" lIns="0" tIns="0" rIns="0" bIns="0" rtlCol="0" anchor="ctr"/>
           <a:lstStyle/>
           <a:p>
-            <a:pPr indent="0" marL="0">
+            <a:pPr marL="0" indent="0">
               <a:buNone/>
             </a:pPr>
             <a:r>
@@ -5213,6 +5583,13 @@
           </a:solidFill>
           <a:ln/>
         </p:spPr>
+        <p:txBody>
+          <a:bodyPr/>
+          <a:lstStyle/>
+          <a:p>
+            <a:endParaRPr lang="en-US"/>
+          </a:p>
+        </p:txBody>
       </p:sp>
       <p:sp>
         <p:nvSpPr>
@@ -5235,7 +5612,7 @@
           <a:bodyPr wrap="square" lIns="0" tIns="0" rIns="0" bIns="0" rtlCol="0" anchor="ctr"/>
           <a:lstStyle/>
           <a:p>
-            <a:pPr indent="0" marL="0">
+            <a:pPr marL="0" indent="0">
               <a:buNone/>
             </a:pPr>
             <a:r>
@@ -5249,9 +5626,6 @@
               </a:rPr>
               <a:t>Weeks 1–3  </a:t>
             </a:r>
-            <a:pPr indent="0" marL="0">
-              <a:buNone/>
-            </a:pPr>
             <a:r>
               <a:rPr lang="en-US" sz="1200" dirty="0">
                 <a:solidFill>
@@ -5286,6 +5660,13 @@
           </a:solidFill>
           <a:ln/>
         </p:spPr>
+        <p:txBody>
+          <a:bodyPr/>
+          <a:lstStyle/>
+          <a:p>
+            <a:endParaRPr lang="en-US"/>
+          </a:p>
+        </p:txBody>
       </p:sp>
       <p:sp>
         <p:nvSpPr>
@@ -5308,7 +5689,7 @@
           <a:bodyPr wrap="square" lIns="0" tIns="0" rIns="0" bIns="0" rtlCol="0" anchor="ctr"/>
           <a:lstStyle/>
           <a:p>
-            <a:pPr indent="0" marL="0">
+            <a:pPr marL="0" indent="0">
               <a:buNone/>
             </a:pPr>
             <a:r>
@@ -5322,9 +5703,6 @@
               </a:rPr>
               <a:t>Weeks 4–6  </a:t>
             </a:r>
-            <a:pPr indent="0" marL="0">
-              <a:buNone/>
-            </a:pPr>
             <a:r>
               <a:rPr lang="en-US" sz="1200" dirty="0">
                 <a:solidFill>
@@ -5359,6 +5737,13 @@
           </a:solidFill>
           <a:ln/>
         </p:spPr>
+        <p:txBody>
+          <a:bodyPr/>
+          <a:lstStyle/>
+          <a:p>
+            <a:endParaRPr lang="en-US"/>
+          </a:p>
+        </p:txBody>
       </p:sp>
       <p:sp>
         <p:nvSpPr>
@@ -5381,7 +5766,7 @@
           <a:bodyPr wrap="square" lIns="0" tIns="0" rIns="0" bIns="0" rtlCol="0" anchor="ctr"/>
           <a:lstStyle/>
           <a:p>
-            <a:pPr indent="0" marL="0">
+            <a:pPr marL="0" indent="0">
               <a:buNone/>
             </a:pPr>
             <a:r>
@@ -5395,9 +5780,6 @@
               </a:rPr>
               <a:t>Weeks 7–9  </a:t>
             </a:r>
-            <a:pPr indent="0" marL="0">
-              <a:buNone/>
-            </a:pPr>
             <a:r>
               <a:rPr lang="en-US" sz="1200" dirty="0">
                 <a:solidFill>
@@ -5432,6 +5814,13 @@
           </a:solidFill>
           <a:ln/>
         </p:spPr>
+        <p:txBody>
+          <a:bodyPr/>
+          <a:lstStyle/>
+          <a:p>
+            <a:endParaRPr lang="en-US"/>
+          </a:p>
+        </p:txBody>
       </p:sp>
       <p:sp>
         <p:nvSpPr>
@@ -5454,7 +5843,7 @@
           <a:bodyPr wrap="square" lIns="0" tIns="0" rIns="0" bIns="0" rtlCol="0" anchor="ctr"/>
           <a:lstStyle/>
           <a:p>
-            <a:pPr indent="0" marL="0">
+            <a:pPr marL="0" indent="0">
               <a:buNone/>
             </a:pPr>
             <a:r>
@@ -5468,9 +5857,6 @@
               </a:rPr>
               <a:t>Weeks 10–12  </a:t>
             </a:r>
-            <a:pPr indent="0" marL="0">
-              <a:buNone/>
-            </a:pPr>
             <a:r>
               <a:rPr lang="en-US" sz="1200" dirty="0">
                 <a:solidFill>
@@ -5505,6 +5891,13 @@
           </a:solidFill>
           <a:ln/>
         </p:spPr>
+        <p:txBody>
+          <a:bodyPr/>
+          <a:lstStyle/>
+          <a:p>
+            <a:endParaRPr lang="en-US"/>
+          </a:p>
+        </p:txBody>
       </p:sp>
       <p:sp>
         <p:nvSpPr>
@@ -5527,7 +5920,7 @@
           <a:bodyPr wrap="square" lIns="0" tIns="0" rIns="0" bIns="0" rtlCol="0" anchor="ctr"/>
           <a:lstStyle/>
           <a:p>
-            <a:pPr indent="0" marL="0">
+            <a:pPr marL="0" indent="0">
               <a:buNone/>
             </a:pPr>
             <a:r>
@@ -5541,9 +5934,6 @@
               </a:rPr>
               <a:t>Weeks 13–15  </a:t>
             </a:r>
-            <a:pPr indent="0" marL="0">
-              <a:buNone/>
-            </a:pPr>
             <a:r>
               <a:rPr lang="en-US" sz="1200" dirty="0">
                 <a:solidFill>
@@ -5580,7 +5970,7 @@
           <a:bodyPr wrap="square" lIns="0" tIns="0" rIns="0" bIns="0" rtlCol="0" anchor="ctr"/>
           <a:lstStyle/>
           <a:p>
-            <a:pPr indent="0" marL="0">
+            <a:pPr marL="0" indent="0">
               <a:buNone/>
             </a:pPr>
             <a:r>
@@ -5622,6 +6012,13 @@
             <a:prstDash val="solid"/>
           </a:ln>
         </p:spPr>
+        <p:txBody>
+          <a:bodyPr/>
+          <a:lstStyle/>
+          <a:p>
+            <a:endParaRPr lang="en-US"/>
+          </a:p>
+        </p:txBody>
       </p:sp>
       <p:sp>
         <p:nvSpPr>
@@ -5644,6 +6041,13 @@
           </a:solidFill>
           <a:ln/>
         </p:spPr>
+        <p:txBody>
+          <a:bodyPr/>
+          <a:lstStyle/>
+          <a:p>
+            <a:endParaRPr lang="en-US"/>
+          </a:p>
+        </p:txBody>
       </p:sp>
       <p:sp>
         <p:nvSpPr>
@@ -5666,7 +6070,7 @@
           <a:bodyPr wrap="square" lIns="0" tIns="0" rIns="0" bIns="0" rtlCol="0" anchor="ctr"/>
           <a:lstStyle/>
           <a:p>
-            <a:pPr indent="0" marL="0">
+            <a:pPr marL="0" indent="0">
               <a:buNone/>
             </a:pPr>
             <a:r>
@@ -5680,9 +6084,6 @@
               </a:rPr>
               <a:t>Labs (14)</a:t>
             </a:r>
-            <a:pPr indent="0" marL="0">
-              <a:buNone/>
-            </a:pPr>
             <a:r>
               <a:rPr lang="en-US" sz="1100" b="1" dirty="0">
                 <a:solidFill>
@@ -5722,6 +6123,13 @@
             <a:prstDash val="solid"/>
           </a:ln>
         </p:spPr>
+        <p:txBody>
+          <a:bodyPr/>
+          <a:lstStyle/>
+          <a:p>
+            <a:endParaRPr lang="en-US"/>
+          </a:p>
+        </p:txBody>
       </p:sp>
       <p:sp>
         <p:nvSpPr>
@@ -5744,6 +6152,13 @@
           </a:solidFill>
           <a:ln/>
         </p:spPr>
+        <p:txBody>
+          <a:bodyPr/>
+          <a:lstStyle/>
+          <a:p>
+            <a:endParaRPr lang="en-US"/>
+          </a:p>
+        </p:txBody>
       </p:sp>
       <p:sp>
         <p:nvSpPr>
@@ -5766,7 +6181,7 @@
           <a:bodyPr wrap="square" lIns="0" tIns="0" rIns="0" bIns="0" rtlCol="0" anchor="ctr"/>
           <a:lstStyle/>
           <a:p>
-            <a:pPr indent="0" marL="0">
+            <a:pPr marL="0" indent="0">
               <a:buNone/>
             </a:pPr>
             <a:r>
@@ -5780,9 +6195,6 @@
               </a:rPr>
               <a:t>Homework (12)</a:t>
             </a:r>
-            <a:pPr indent="0" marL="0">
-              <a:buNone/>
-            </a:pPr>
             <a:r>
               <a:rPr lang="en-US" sz="1100" b="1" dirty="0">
                 <a:solidFill>
@@ -5822,6 +6234,13 @@
             <a:prstDash val="solid"/>
           </a:ln>
         </p:spPr>
+        <p:txBody>
+          <a:bodyPr/>
+          <a:lstStyle/>
+          <a:p>
+            <a:endParaRPr lang="en-US"/>
+          </a:p>
+        </p:txBody>
       </p:sp>
       <p:sp>
         <p:nvSpPr>
@@ -5844,6 +6263,13 @@
           </a:solidFill>
           <a:ln/>
         </p:spPr>
+        <p:txBody>
+          <a:bodyPr/>
+          <a:lstStyle/>
+          <a:p>
+            <a:endParaRPr lang="en-US"/>
+          </a:p>
+        </p:txBody>
       </p:sp>
       <p:sp>
         <p:nvSpPr>
@@ -5866,7 +6292,7 @@
           <a:bodyPr wrap="square" lIns="0" tIns="0" rIns="0" bIns="0" rtlCol="0" anchor="ctr"/>
           <a:lstStyle/>
           <a:p>
-            <a:pPr indent="0" marL="0">
+            <a:pPr marL="0" indent="0">
               <a:buNone/>
             </a:pPr>
             <a:r>
@@ -5880,9 +6306,6 @@
               </a:rPr>
               <a:t>Quizzes (8)</a:t>
             </a:r>
-            <a:pPr indent="0" marL="0">
-              <a:buNone/>
-            </a:pPr>
             <a:r>
               <a:rPr lang="en-US" sz="1100" b="1" dirty="0">
                 <a:solidFill>
@@ -5922,6 +6345,13 @@
             <a:prstDash val="solid"/>
           </a:ln>
         </p:spPr>
+        <p:txBody>
+          <a:bodyPr/>
+          <a:lstStyle/>
+          <a:p>
+            <a:endParaRPr lang="en-US"/>
+          </a:p>
+        </p:txBody>
       </p:sp>
       <p:sp>
         <p:nvSpPr>
@@ -5944,6 +6374,13 @@
           </a:solidFill>
           <a:ln/>
         </p:spPr>
+        <p:txBody>
+          <a:bodyPr/>
+          <a:lstStyle/>
+          <a:p>
+            <a:endParaRPr lang="en-US"/>
+          </a:p>
+        </p:txBody>
       </p:sp>
       <p:sp>
         <p:nvSpPr>
@@ -5966,7 +6403,7 @@
           <a:bodyPr wrap="square" lIns="0" tIns="0" rIns="0" bIns="0" rtlCol="0" anchor="ctr"/>
           <a:lstStyle/>
           <a:p>
-            <a:pPr indent="0" marL="0">
+            <a:pPr marL="0" indent="0">
               <a:buNone/>
             </a:pPr>
             <a:r>
@@ -5980,9 +6417,6 @@
               </a:rPr>
               <a:t>Midterm Exam</a:t>
             </a:r>
-            <a:pPr indent="0" marL="0">
-              <a:buNone/>
-            </a:pPr>
             <a:r>
               <a:rPr lang="en-US" sz="1100" b="1" dirty="0">
                 <a:solidFill>
@@ -6022,6 +6456,13 @@
             <a:prstDash val="solid"/>
           </a:ln>
         </p:spPr>
+        <p:txBody>
+          <a:bodyPr/>
+          <a:lstStyle/>
+          <a:p>
+            <a:endParaRPr lang="en-US"/>
+          </a:p>
+        </p:txBody>
       </p:sp>
       <p:sp>
         <p:nvSpPr>
@@ -6044,6 +6485,13 @@
           </a:solidFill>
           <a:ln/>
         </p:spPr>
+        <p:txBody>
+          <a:bodyPr/>
+          <a:lstStyle/>
+          <a:p>
+            <a:endParaRPr lang="en-US"/>
+          </a:p>
+        </p:txBody>
       </p:sp>
       <p:sp>
         <p:nvSpPr>
@@ -6066,7 +6514,7 @@
           <a:bodyPr wrap="square" lIns="0" tIns="0" rIns="0" bIns="0" rtlCol="0" anchor="ctr"/>
           <a:lstStyle/>
           <a:p>
-            <a:pPr indent="0" marL="0">
+            <a:pPr marL="0" indent="0">
               <a:buNone/>
             </a:pPr>
             <a:r>
@@ -6080,9 +6528,6 @@
               </a:rPr>
               <a:t>Capstone Project</a:t>
             </a:r>
-            <a:pPr indent="0" marL="0">
-              <a:buNone/>
-            </a:pPr>
             <a:r>
               <a:rPr lang="en-US" sz="1100" b="1" dirty="0">
                 <a:solidFill>
@@ -6119,7 +6564,7 @@
           <a:bodyPr wrap="square" lIns="0" tIns="0" rIns="0" bIns="0" rtlCol="0" anchor="ctr"/>
           <a:lstStyle/>
           <a:p>
-            <a:pPr algn="r" indent="0" marL="0">
+            <a:pPr marL="0" indent="0" algn="r">
               <a:buNone/>
             </a:pPr>
             <a:r>
@@ -6153,6 +6598,7 @@
         <a:solidFill>
           <a:srgbClr val="F5F8FC"/>
         </a:solidFill>
+        <a:effectLst/>
       </p:bgPr>
     </p:bg>
     <p:spTree>
@@ -6193,6 +6639,13 @@
             <a:prstDash val="solid"/>
           </a:ln>
         </p:spPr>
+        <p:txBody>
+          <a:bodyPr/>
+          <a:lstStyle/>
+          <a:p>
+            <a:endParaRPr lang="en-US"/>
+          </a:p>
+        </p:txBody>
       </p:sp>
       <p:sp>
         <p:nvSpPr>
@@ -6215,7 +6668,7 @@
           <a:bodyPr wrap="square" lIns="0" tIns="0" rIns="0" bIns="0" rtlCol="0" anchor="ctr"/>
           <a:lstStyle/>
           <a:p>
-            <a:pPr indent="0" marL="0">
+            <a:pPr marL="0" indent="0">
               <a:buNone/>
             </a:pPr>
             <a:r>
@@ -6257,6 +6710,13 @@
             <a:prstDash val="solid"/>
           </a:ln>
         </p:spPr>
+        <p:txBody>
+          <a:bodyPr/>
+          <a:lstStyle/>
+          <a:p>
+            <a:endParaRPr lang="en-US"/>
+          </a:p>
+        </p:txBody>
       </p:sp>
       <p:sp>
         <p:nvSpPr>
@@ -6279,7 +6739,7 @@
           <a:bodyPr wrap="square" lIns="0" tIns="0" rIns="0" bIns="0" rtlCol="0" anchor="ctr"/>
           <a:lstStyle/>
           <a:p>
-            <a:pPr indent="0" marL="0">
+            <a:pPr marL="0" indent="0">
               <a:buNone/>
             </a:pPr>
             <a:r>
@@ -6321,13 +6781,20 @@
             <a:prstDash val="solid"/>
           </a:ln>
           <a:effectLst>
-            <a:outerShdw sx="100000" sy="100000" kx="0" ky="0" algn="bl" rotWithShape="0" blurRad="101600" dist="25400" dir="8100000">
+            <a:outerShdw blurRad="101600" dist="25400" dir="8100000" algn="bl" rotWithShape="0">
               <a:srgbClr val="000000">
                 <a:alpha val="12000"/>
               </a:srgbClr>
             </a:outerShdw>
           </a:effectLst>
         </p:spPr>
+        <p:txBody>
+          <a:bodyPr/>
+          <a:lstStyle/>
+          <a:p>
+            <a:endParaRPr lang="en-US"/>
+          </a:p>
+        </p:txBody>
       </p:sp>
       <p:sp>
         <p:nvSpPr>
@@ -6348,17 +6815,24 @@
           </a:solidFill>
           <a:ln/>
         </p:spPr>
+        <p:txBody>
+          <a:bodyPr/>
+          <a:lstStyle/>
+          <a:p>
+            <a:endParaRPr lang="en-US"/>
+          </a:p>
+        </p:txBody>
       </p:sp>
       <p:pic>
         <p:nvPicPr>
-          <p:cNvPr id="8" name="Image 0" descr="preencoded.png">    </p:cNvPr>
+          <p:cNvPr id="8" name="Image 0" descr="preencoded.png"/>
           <p:cNvPicPr>
             <a:picLocks noChangeAspect="1"/>
           </p:cNvPicPr>
           <p:nvPr/>
         </p:nvPicPr>
         <p:blipFill>
-          <a:blip r:embed="rId1"/>
+          <a:blip r:embed="rId3"/>
           <a:stretch>
             <a:fillRect/>
           </a:stretch>
@@ -6394,7 +6868,7 @@
           <a:bodyPr wrap="square" lIns="0" tIns="0" rIns="0" bIns="0" rtlCol="0" anchor="t"/>
           <a:lstStyle/>
           <a:p>
-            <a:pPr indent="0" marL="0">
+            <a:pPr marL="0" indent="0">
               <a:buNone/>
             </a:pPr>
             <a:r>
@@ -6411,7 +6885,7 @@
             <a:endParaRPr lang="en-US" sz="1200" dirty="0"/>
           </a:p>
           <a:p>
-            <a:pPr indent="0" marL="0">
+            <a:pPr marL="0" indent="0">
               <a:buNone/>
             </a:pPr>
             <a:r>
@@ -6453,13 +6927,20 @@
             <a:prstDash val="solid"/>
           </a:ln>
           <a:effectLst>
-            <a:outerShdw sx="100000" sy="100000" kx="0" ky="0" algn="bl" rotWithShape="0" blurRad="101600" dist="25400" dir="8100000">
+            <a:outerShdw blurRad="101600" dist="25400" dir="8100000" algn="bl" rotWithShape="0">
               <a:srgbClr val="000000">
                 <a:alpha val="12000"/>
               </a:srgbClr>
             </a:outerShdw>
           </a:effectLst>
         </p:spPr>
+        <p:txBody>
+          <a:bodyPr/>
+          <a:lstStyle/>
+          <a:p>
+            <a:endParaRPr lang="en-US"/>
+          </a:p>
+        </p:txBody>
       </p:sp>
       <p:sp>
         <p:nvSpPr>
@@ -6480,17 +6961,24 @@
           </a:solidFill>
           <a:ln/>
         </p:spPr>
+        <p:txBody>
+          <a:bodyPr/>
+          <a:lstStyle/>
+          <a:p>
+            <a:endParaRPr lang="en-US"/>
+          </a:p>
+        </p:txBody>
       </p:sp>
       <p:pic>
         <p:nvPicPr>
-          <p:cNvPr id="12" name="Image 1" descr="preencoded.png">    </p:cNvPr>
+          <p:cNvPr id="12" name="Image 1" descr="preencoded.png"/>
           <p:cNvPicPr>
             <a:picLocks noChangeAspect="1"/>
           </p:cNvPicPr>
           <p:nvPr/>
         </p:nvPicPr>
         <p:blipFill>
-          <a:blip r:embed="rId2"/>
+          <a:blip r:embed="rId4"/>
           <a:stretch>
             <a:fillRect/>
           </a:stretch>
@@ -6526,7 +7014,7 @@
           <a:bodyPr wrap="square" lIns="0" tIns="0" rIns="0" bIns="0" rtlCol="0" anchor="t"/>
           <a:lstStyle/>
           <a:p>
-            <a:pPr indent="0" marL="0">
+            <a:pPr marL="0" indent="0">
               <a:buNone/>
             </a:pPr>
             <a:r>
@@ -6543,7 +7031,7 @@
             <a:endParaRPr lang="en-US" sz="1200" dirty="0"/>
           </a:p>
           <a:p>
-            <a:pPr indent="0" marL="0">
+            <a:pPr marL="0" indent="0">
               <a:buNone/>
             </a:pPr>
             <a:r>
@@ -6585,13 +7073,20 @@
             <a:prstDash val="solid"/>
           </a:ln>
           <a:effectLst>
-            <a:outerShdw sx="100000" sy="100000" kx="0" ky="0" algn="bl" rotWithShape="0" blurRad="101600" dist="25400" dir="8100000">
+            <a:outerShdw blurRad="101600" dist="25400" dir="8100000" algn="bl" rotWithShape="0">
               <a:srgbClr val="000000">
                 <a:alpha val="12000"/>
               </a:srgbClr>
             </a:outerShdw>
           </a:effectLst>
         </p:spPr>
+        <p:txBody>
+          <a:bodyPr/>
+          <a:lstStyle/>
+          <a:p>
+            <a:endParaRPr lang="en-US"/>
+          </a:p>
+        </p:txBody>
       </p:sp>
       <p:sp>
         <p:nvSpPr>
@@ -6612,17 +7107,24 @@
           </a:solidFill>
           <a:ln/>
         </p:spPr>
+        <p:txBody>
+          <a:bodyPr/>
+          <a:lstStyle/>
+          <a:p>
+            <a:endParaRPr lang="en-US"/>
+          </a:p>
+        </p:txBody>
       </p:sp>
       <p:pic>
         <p:nvPicPr>
-          <p:cNvPr id="16" name="Image 2" descr="preencoded.png">    </p:cNvPr>
+          <p:cNvPr id="16" name="Image 2" descr="preencoded.png"/>
           <p:cNvPicPr>
             <a:picLocks noChangeAspect="1"/>
           </p:cNvPicPr>
           <p:nvPr/>
         </p:nvPicPr>
         <p:blipFill>
-          <a:blip r:embed="rId3"/>
+          <a:blip r:embed="rId5"/>
           <a:stretch>
             <a:fillRect/>
           </a:stretch>
@@ -6658,7 +7160,7 @@
           <a:bodyPr wrap="square" lIns="0" tIns="0" rIns="0" bIns="0" rtlCol="0" anchor="t"/>
           <a:lstStyle/>
           <a:p>
-            <a:pPr indent="0" marL="0">
+            <a:pPr marL="0" indent="0">
               <a:buNone/>
             </a:pPr>
             <a:r>
@@ -6675,7 +7177,7 @@
             <a:endParaRPr lang="en-US" sz="1200" dirty="0"/>
           </a:p>
           <a:p>
-            <a:pPr indent="0" marL="0">
+            <a:pPr marL="0" indent="0">
               <a:buNone/>
             </a:pPr>
             <a:r>
@@ -6717,13 +7219,20 @@
             <a:prstDash val="solid"/>
           </a:ln>
           <a:effectLst>
-            <a:outerShdw sx="100000" sy="100000" kx="0" ky="0" algn="bl" rotWithShape="0" blurRad="101600" dist="25400" dir="8100000">
+            <a:outerShdw blurRad="101600" dist="25400" dir="8100000" algn="bl" rotWithShape="0">
               <a:srgbClr val="000000">
                 <a:alpha val="12000"/>
               </a:srgbClr>
             </a:outerShdw>
           </a:effectLst>
         </p:spPr>
+        <p:txBody>
+          <a:bodyPr/>
+          <a:lstStyle/>
+          <a:p>
+            <a:endParaRPr lang="en-US"/>
+          </a:p>
+        </p:txBody>
       </p:sp>
       <p:sp>
         <p:nvSpPr>
@@ -6744,17 +7253,24 @@
           </a:solidFill>
           <a:ln/>
         </p:spPr>
+        <p:txBody>
+          <a:bodyPr/>
+          <a:lstStyle/>
+          <a:p>
+            <a:endParaRPr lang="en-US"/>
+          </a:p>
+        </p:txBody>
       </p:sp>
       <p:pic>
         <p:nvPicPr>
-          <p:cNvPr id="20" name="Image 3" descr="preencoded.png">    </p:cNvPr>
+          <p:cNvPr id="20" name="Image 3" descr="preencoded.png"/>
           <p:cNvPicPr>
             <a:picLocks noChangeAspect="1"/>
           </p:cNvPicPr>
           <p:nvPr/>
         </p:nvPicPr>
         <p:blipFill>
-          <a:blip r:embed="rId4"/>
+          <a:blip r:embed="rId6"/>
           <a:stretch>
             <a:fillRect/>
           </a:stretch>
@@ -6790,7 +7306,7 @@
           <a:bodyPr wrap="square" lIns="0" tIns="0" rIns="0" bIns="0" rtlCol="0" anchor="t"/>
           <a:lstStyle/>
           <a:p>
-            <a:pPr indent="0" marL="0">
+            <a:pPr marL="0" indent="0">
               <a:buNone/>
             </a:pPr>
             <a:r>
@@ -6807,7 +7323,7 @@
             <a:endParaRPr lang="en-US" sz="1200" dirty="0"/>
           </a:p>
           <a:p>
-            <a:pPr indent="0" marL="0">
+            <a:pPr marL="0" indent="0">
               <a:buNone/>
             </a:pPr>
             <a:r>
@@ -6849,13 +7365,20 @@
             <a:prstDash val="solid"/>
           </a:ln>
           <a:effectLst>
-            <a:outerShdw sx="100000" sy="100000" kx="0" ky="0" algn="bl" rotWithShape="0" blurRad="101600" dist="25400" dir="8100000">
+            <a:outerShdw blurRad="101600" dist="25400" dir="8100000" algn="bl" rotWithShape="0">
               <a:srgbClr val="000000">
                 <a:alpha val="12000"/>
               </a:srgbClr>
             </a:outerShdw>
           </a:effectLst>
         </p:spPr>
+        <p:txBody>
+          <a:bodyPr/>
+          <a:lstStyle/>
+          <a:p>
+            <a:endParaRPr lang="en-US"/>
+          </a:p>
+        </p:txBody>
       </p:sp>
       <p:sp>
         <p:nvSpPr>
@@ -6878,11 +7401,11 @@
           <a:bodyPr wrap="square" lIns="0" tIns="0" rIns="0" bIns="0" rtlCol="0" anchor="ctr"/>
           <a:lstStyle/>
           <a:p>
-            <a:pPr algn="ctr" indent="0" marL="0">
-              <a:buNone/>
-            </a:pPr>
-            <a:r>
-              <a:rPr lang="en-US" sz="1100" b="1" spc="200" kern="0" dirty="0">
+            <a:pPr marL="0" indent="0" algn="ctr">
+              <a:buNone/>
+            </a:pPr>
+            <a:r>
+              <a:rPr lang="en-US" sz="1100" b="1" kern="0" spc="200" dirty="0">
                 <a:solidFill>
                   <a:srgbClr val="BDD7EE"/>
                 </a:solidFill>
@@ -6915,6 +7438,13 @@
           </a:solidFill>
           <a:ln/>
         </p:spPr>
+        <p:txBody>
+          <a:bodyPr/>
+          <a:lstStyle/>
+          <a:p>
+            <a:endParaRPr lang="en-US"/>
+          </a:p>
+        </p:txBody>
       </p:sp>
       <p:sp>
         <p:nvSpPr>
@@ -6937,7 +7467,7 @@
           <a:bodyPr wrap="square" lIns="0" tIns="0" rIns="0" bIns="0" rtlCol="0" anchor="ctr"/>
           <a:lstStyle/>
           <a:p>
-            <a:pPr indent="0" marL="0">
+            <a:pPr marL="0" indent="0">
               <a:buNone/>
             </a:pPr>
             <a:r>
@@ -6954,7 +7484,7 @@
             <a:endParaRPr lang="en-US" sz="1300" dirty="0"/>
           </a:p>
           <a:p>
-            <a:pPr indent="0" marL="0">
+            <a:pPr marL="0" indent="0">
               <a:buNone/>
             </a:pPr>
             <a:r>
@@ -6971,7 +7501,7 @@
             <a:endParaRPr lang="en-US" sz="1300" dirty="0"/>
           </a:p>
           <a:p>
-            <a:pPr indent="0" marL="0">
+            <a:pPr marL="0" indent="0">
               <a:buNone/>
             </a:pPr>
             <a:r>
@@ -7008,6 +7538,13 @@
           </a:solidFill>
           <a:ln/>
         </p:spPr>
+        <p:txBody>
+          <a:bodyPr/>
+          <a:lstStyle/>
+          <a:p>
+            <a:endParaRPr lang="en-US"/>
+          </a:p>
+        </p:txBody>
       </p:sp>
       <p:sp>
         <p:nvSpPr>
@@ -7030,7 +7567,7 @@
           <a:bodyPr wrap="square" lIns="0" tIns="0" rIns="0" bIns="0" rtlCol="0" anchor="ctr"/>
           <a:lstStyle/>
           <a:p>
-            <a:pPr indent="0" marL="0">
+            <a:pPr marL="0" indent="0">
               <a:buNone/>
             </a:pPr>
             <a:r>
@@ -7047,7 +7584,7 @@
             <a:endParaRPr lang="en-US" sz="1300" dirty="0"/>
           </a:p>
           <a:p>
-            <a:pPr indent="0" marL="0">
+            <a:pPr marL="0" indent="0">
               <a:buNone/>
             </a:pPr>
             <a:r>
@@ -7064,7 +7601,7 @@
             <a:endParaRPr lang="en-US" sz="1300" dirty="0"/>
           </a:p>
           <a:p>
-            <a:pPr indent="0" marL="0">
+            <a:pPr marL="0" indent="0">
               <a:buNone/>
             </a:pPr>
             <a:r>
@@ -7101,6 +7638,13 @@
           </a:solidFill>
           <a:ln/>
         </p:spPr>
+        <p:txBody>
+          <a:bodyPr/>
+          <a:lstStyle/>
+          <a:p>
+            <a:endParaRPr lang="en-US"/>
+          </a:p>
+        </p:txBody>
       </p:sp>
       <p:sp>
         <p:nvSpPr>
@@ -7123,7 +7667,7 @@
           <a:bodyPr wrap="square" lIns="0" tIns="0" rIns="0" bIns="0" rtlCol="0" anchor="ctr"/>
           <a:lstStyle/>
           <a:p>
-            <a:pPr indent="0" marL="0">
+            <a:pPr marL="0" indent="0">
               <a:buNone/>
             </a:pPr>
             <a:r>
@@ -7140,7 +7684,7 @@
             <a:endParaRPr lang="en-US" sz="1300" dirty="0"/>
           </a:p>
           <a:p>
-            <a:pPr indent="0" marL="0">
+            <a:pPr marL="0" indent="0">
               <a:buNone/>
             </a:pPr>
             <a:r>
@@ -7157,7 +7701,7 @@
             <a:endParaRPr lang="en-US" sz="1300" dirty="0"/>
           </a:p>
           <a:p>
-            <a:pPr indent="0" marL="0">
+            <a:pPr marL="0" indent="0">
               <a:buNone/>
             </a:pPr>
             <a:r>
@@ -7196,7 +7740,7 @@
           <a:bodyPr wrap="square" lIns="0" tIns="0" rIns="0" bIns="0" rtlCol="0" anchor="ctr"/>
           <a:lstStyle/>
           <a:p>
-            <a:pPr algn="r" indent="0" marL="0">
+            <a:pPr marL="0" indent="0" algn="r">
               <a:buNone/>
             </a:pPr>
             <a:r>
@@ -7230,6 +7774,7 @@
         <a:solidFill>
           <a:srgbClr val="FFFFFF"/>
         </a:solidFill>
+        <a:effectLst/>
       </p:bgPr>
     </p:bg>
     <p:spTree>
@@ -7270,6 +7815,13 @@
             <a:prstDash val="solid"/>
           </a:ln>
         </p:spPr>
+        <p:txBody>
+          <a:bodyPr/>
+          <a:lstStyle/>
+          <a:p>
+            <a:endParaRPr lang="en-US"/>
+          </a:p>
+        </p:txBody>
       </p:sp>
       <p:sp>
         <p:nvSpPr>
@@ -7292,7 +7844,7 @@
           <a:bodyPr wrap="square" lIns="0" tIns="0" rIns="0" bIns="0" rtlCol="0" anchor="ctr"/>
           <a:lstStyle/>
           <a:p>
-            <a:pPr indent="0" marL="0">
+            <a:pPr marL="0" indent="0">
               <a:buNone/>
             </a:pPr>
             <a:r>
@@ -7334,6 +7886,13 @@
             <a:prstDash val="solid"/>
           </a:ln>
         </p:spPr>
+        <p:txBody>
+          <a:bodyPr/>
+          <a:lstStyle/>
+          <a:p>
+            <a:endParaRPr lang="en-US"/>
+          </a:p>
+        </p:txBody>
       </p:sp>
       <p:sp>
         <p:nvSpPr>
@@ -7356,7 +7915,7 @@
           <a:bodyPr wrap="square" lIns="0" tIns="0" rIns="0" bIns="0" rtlCol="0" anchor="ctr"/>
           <a:lstStyle/>
           <a:p>
-            <a:pPr indent="0" marL="0">
+            <a:pPr marL="0" indent="0">
               <a:buNone/>
             </a:pPr>
             <a:r>
@@ -7398,13 +7957,20 @@
             <a:prstDash val="solid"/>
           </a:ln>
           <a:effectLst>
-            <a:outerShdw sx="100000" sy="100000" kx="0" ky="0" algn="bl" rotWithShape="0" blurRad="101600" dist="25400" dir="8100000">
+            <a:outerShdw blurRad="101600" dist="25400" dir="8100000" algn="bl" rotWithShape="0">
               <a:srgbClr val="000000">
                 <a:alpha val="12000"/>
               </a:srgbClr>
             </a:outerShdw>
           </a:effectLst>
         </p:spPr>
+        <p:txBody>
+          <a:bodyPr/>
+          <a:lstStyle/>
+          <a:p>
+            <a:endParaRPr lang="en-US"/>
+          </a:p>
+        </p:txBody>
       </p:sp>
       <p:sp>
         <p:nvSpPr>
@@ -7425,6 +7991,13 @@
           </a:solidFill>
           <a:ln/>
         </p:spPr>
+        <p:txBody>
+          <a:bodyPr/>
+          <a:lstStyle/>
+          <a:p>
+            <a:endParaRPr lang="en-US"/>
+          </a:p>
+        </p:txBody>
       </p:sp>
       <p:sp>
         <p:nvSpPr>
@@ -7447,11 +8020,11 @@
           <a:bodyPr wrap="square" lIns="0" tIns="0" rIns="0" bIns="0" rtlCol="0" anchor="ctr"/>
           <a:lstStyle/>
           <a:p>
-            <a:pPr indent="0" marL="0">
-              <a:buNone/>
-            </a:pPr>
-            <a:r>
-              <a:rPr lang="en-US" sz="1000" b="1" spc="150" kern="0" dirty="0">
+            <a:pPr marL="0" indent="0">
+              <a:buNone/>
+            </a:pPr>
+            <a:r>
+              <a:rPr lang="en-US" sz="1000" b="1" kern="0" spc="150" dirty="0">
                 <a:solidFill>
                   <a:srgbClr val="AADDFF"/>
                 </a:solidFill>
@@ -7486,7 +8059,7 @@
           <a:bodyPr wrap="square" lIns="0" tIns="0" rIns="0" bIns="0" rtlCol="0" anchor="ctr"/>
           <a:lstStyle/>
           <a:p>
-            <a:pPr indent="0" marL="0">
+            <a:pPr marL="0" indent="0">
               <a:buNone/>
             </a:pPr>
             <a:r>
@@ -7525,7 +8098,7 @@
           <a:bodyPr wrap="square" lIns="0" tIns="0" rIns="0" bIns="0" rtlCol="0" anchor="ctr"/>
           <a:lstStyle/>
           <a:p>
-            <a:pPr indent="0" marL="0">
+            <a:pPr marL="0" indent="0">
               <a:buNone/>
             </a:pPr>
             <a:r>
@@ -7673,13 +8246,20 @@
             <a:prstDash val="solid"/>
           </a:ln>
           <a:effectLst>
-            <a:outerShdw sx="100000" sy="100000" kx="0" ky="0" algn="bl" rotWithShape="0" blurRad="101600" dist="25400" dir="8100000">
+            <a:outerShdw blurRad="101600" dist="25400" dir="8100000" algn="bl" rotWithShape="0">
               <a:srgbClr val="000000">
                 <a:alpha val="12000"/>
               </a:srgbClr>
             </a:outerShdw>
           </a:effectLst>
         </p:spPr>
+        <p:txBody>
+          <a:bodyPr/>
+          <a:lstStyle/>
+          <a:p>
+            <a:endParaRPr lang="en-US"/>
+          </a:p>
+        </p:txBody>
       </p:sp>
       <p:sp>
         <p:nvSpPr>
@@ -7700,6 +8280,13 @@
           </a:solidFill>
           <a:ln/>
         </p:spPr>
+        <p:txBody>
+          <a:bodyPr/>
+          <a:lstStyle/>
+          <a:p>
+            <a:endParaRPr lang="en-US"/>
+          </a:p>
+        </p:txBody>
       </p:sp>
       <p:sp>
         <p:nvSpPr>
@@ -7722,11 +8309,11 @@
           <a:bodyPr wrap="square" lIns="0" tIns="0" rIns="0" bIns="0" rtlCol="0" anchor="ctr"/>
           <a:lstStyle/>
           <a:p>
-            <a:pPr indent="0" marL="0">
-              <a:buNone/>
-            </a:pPr>
-            <a:r>
-              <a:rPr lang="en-US" sz="1000" b="1" spc="150" kern="0" dirty="0">
+            <a:pPr marL="0" indent="0">
+              <a:buNone/>
+            </a:pPr>
+            <a:r>
+              <a:rPr lang="en-US" sz="1000" b="1" kern="0" spc="150" dirty="0">
                 <a:solidFill>
                   <a:srgbClr val="AADDFF"/>
                 </a:solidFill>
@@ -7761,7 +8348,7 @@
           <a:bodyPr wrap="square" lIns="0" tIns="0" rIns="0" bIns="0" rtlCol="0" anchor="ctr"/>
           <a:lstStyle/>
           <a:p>
-            <a:pPr indent="0" marL="0">
+            <a:pPr marL="0" indent="0">
               <a:buNone/>
             </a:pPr>
             <a:r>
@@ -7800,7 +8387,7 @@
           <a:bodyPr wrap="square" lIns="0" tIns="0" rIns="0" bIns="0" rtlCol="0" anchor="ctr"/>
           <a:lstStyle/>
           <a:p>
-            <a:pPr indent="0" marL="0">
+            <a:pPr marL="0" indent="0">
               <a:buNone/>
             </a:pPr>
             <a:r>
@@ -7945,7 +8532,7 @@
           <a:bodyPr wrap="square" lIns="0" tIns="0" rIns="0" bIns="0" rtlCol="0" anchor="ctr"/>
           <a:lstStyle/>
           <a:p>
-            <a:pPr algn="ctr" indent="0" marL="0">
+            <a:pPr marL="0" indent="0" algn="ctr">
               <a:buNone/>
             </a:pPr>
             <a:r>
@@ -7984,7 +8571,7 @@
           <a:bodyPr wrap="square" lIns="0" tIns="0" rIns="0" bIns="0" rtlCol="0" anchor="ctr"/>
           <a:lstStyle/>
           <a:p>
-            <a:pPr algn="r" indent="0" marL="0">
+            <a:pPr marL="0" indent="0" algn="r">
               <a:buNone/>
             </a:pPr>
             <a:r>
@@ -8018,6 +8605,7 @@
         <a:solidFill>
           <a:srgbClr val="F5F8FC"/>
         </a:solidFill>
+        <a:effectLst/>
       </p:bgPr>
     </p:bg>
     <p:spTree>
@@ -8058,6 +8646,13 @@
             <a:prstDash val="solid"/>
           </a:ln>
         </p:spPr>
+        <p:txBody>
+          <a:bodyPr/>
+          <a:lstStyle/>
+          <a:p>
+            <a:endParaRPr lang="en-US"/>
+          </a:p>
+        </p:txBody>
       </p:sp>
       <p:sp>
         <p:nvSpPr>
@@ -8080,7 +8675,7 @@
           <a:bodyPr wrap="square" lIns="0" tIns="0" rIns="0" bIns="0" rtlCol="0" anchor="ctr"/>
           <a:lstStyle/>
           <a:p>
-            <a:pPr indent="0" marL="0">
+            <a:pPr marL="0" indent="0">
               <a:buNone/>
             </a:pPr>
             <a:r>
@@ -8122,6 +8717,13 @@
             <a:prstDash val="solid"/>
           </a:ln>
         </p:spPr>
+        <p:txBody>
+          <a:bodyPr/>
+          <a:lstStyle/>
+          <a:p>
+            <a:endParaRPr lang="en-US"/>
+          </a:p>
+        </p:txBody>
       </p:sp>
       <p:sp>
         <p:nvSpPr>
@@ -8144,7 +8746,7 @@
           <a:bodyPr wrap="square" lIns="0" tIns="0" rIns="0" bIns="0" rtlCol="0" anchor="ctr"/>
           <a:lstStyle/>
           <a:p>
-            <a:pPr indent="0" marL="0">
+            <a:pPr marL="0" indent="0">
               <a:buNone/>
             </a:pPr>
             <a:r>
@@ -8186,6 +8788,13 @@
             <a:prstDash val="solid"/>
           </a:ln>
         </p:spPr>
+        <p:txBody>
+          <a:bodyPr/>
+          <a:lstStyle/>
+          <a:p>
+            <a:endParaRPr lang="en-US"/>
+          </a:p>
+        </p:txBody>
       </p:sp>
       <p:sp>
         <p:nvSpPr>
@@ -8208,7 +8817,7 @@
           <a:bodyPr wrap="square" lIns="0" tIns="0" rIns="0" bIns="0" rtlCol="0" anchor="ctr"/>
           <a:lstStyle/>
           <a:p>
-            <a:pPr indent="0" marL="0">
+            <a:pPr marL="0" indent="0">
               <a:buNone/>
             </a:pPr>
             <a:r>
@@ -8247,7 +8856,7 @@
           <a:bodyPr wrap="square" lIns="0" tIns="0" rIns="0" bIns="0" rtlCol="0" anchor="ctr"/>
           <a:lstStyle/>
           <a:p>
-            <a:pPr indent="0" marL="0">
+            <a:pPr marL="0" indent="0">
               <a:buNone/>
             </a:pPr>
             <a:r>
@@ -8289,6 +8898,13 @@
             <a:prstDash val="solid"/>
           </a:ln>
         </p:spPr>
+        <p:txBody>
+          <a:bodyPr/>
+          <a:lstStyle/>
+          <a:p>
+            <a:endParaRPr lang="en-US"/>
+          </a:p>
+        </p:txBody>
       </p:sp>
       <p:sp>
         <p:nvSpPr>
@@ -8311,7 +8927,7 @@
           <a:bodyPr wrap="square" lIns="0" tIns="0" rIns="0" bIns="0" rtlCol="0" anchor="ctr"/>
           <a:lstStyle/>
           <a:p>
-            <a:pPr indent="0" marL="0">
+            <a:pPr marL="0" indent="0">
               <a:buNone/>
             </a:pPr>
             <a:r>
@@ -8350,7 +8966,7 @@
           <a:bodyPr wrap="square" lIns="0" tIns="0" rIns="0" bIns="0" rtlCol="0" anchor="ctr"/>
           <a:lstStyle/>
           <a:p>
-            <a:pPr indent="0" marL="0">
+            <a:pPr marL="0" indent="0">
               <a:buNone/>
             </a:pPr>
             <a:r>
@@ -8392,6 +9008,13 @@
             <a:prstDash val="solid"/>
           </a:ln>
         </p:spPr>
+        <p:txBody>
+          <a:bodyPr/>
+          <a:lstStyle/>
+          <a:p>
+            <a:endParaRPr lang="en-US"/>
+          </a:p>
+        </p:txBody>
       </p:sp>
       <p:sp>
         <p:nvSpPr>
@@ -8414,7 +9037,7 @@
           <a:bodyPr wrap="square" lIns="0" tIns="0" rIns="0" bIns="0" rtlCol="0" anchor="ctr"/>
           <a:lstStyle/>
           <a:p>
-            <a:pPr indent="0" marL="0">
+            <a:pPr marL="0" indent="0">
               <a:buNone/>
             </a:pPr>
             <a:r>
@@ -8453,7 +9076,7 @@
           <a:bodyPr wrap="square" lIns="0" tIns="0" rIns="0" bIns="0" rtlCol="0" anchor="ctr"/>
           <a:lstStyle/>
           <a:p>
-            <a:pPr indent="0" marL="0">
+            <a:pPr marL="0" indent="0">
               <a:buNone/>
             </a:pPr>
             <a:r>
@@ -8495,6 +9118,13 @@
             <a:prstDash val="solid"/>
           </a:ln>
         </p:spPr>
+        <p:txBody>
+          <a:bodyPr/>
+          <a:lstStyle/>
+          <a:p>
+            <a:endParaRPr lang="en-US"/>
+          </a:p>
+        </p:txBody>
       </p:sp>
       <p:sp>
         <p:nvSpPr>
@@ -8517,7 +9147,7 @@
           <a:bodyPr wrap="square" lIns="0" tIns="0" rIns="0" bIns="0" rtlCol="0" anchor="ctr"/>
           <a:lstStyle/>
           <a:p>
-            <a:pPr indent="0" marL="0">
+            <a:pPr marL="0" indent="0">
               <a:buNone/>
             </a:pPr>
             <a:r>
@@ -8556,7 +9186,7 @@
           <a:bodyPr wrap="square" lIns="0" tIns="0" rIns="0" bIns="0" rtlCol="0" anchor="ctr"/>
           <a:lstStyle/>
           <a:p>
-            <a:pPr indent="0" marL="0">
+            <a:pPr marL="0" indent="0">
               <a:buNone/>
             </a:pPr>
             <a:r>
@@ -8598,6 +9228,13 @@
             <a:prstDash val="solid"/>
           </a:ln>
         </p:spPr>
+        <p:txBody>
+          <a:bodyPr/>
+          <a:lstStyle/>
+          <a:p>
+            <a:endParaRPr lang="en-US"/>
+          </a:p>
+        </p:txBody>
       </p:sp>
       <p:sp>
         <p:nvSpPr>
@@ -8620,7 +9257,7 @@
           <a:bodyPr wrap="square" lIns="0" tIns="0" rIns="0" bIns="0" rtlCol="0" anchor="ctr"/>
           <a:lstStyle/>
           <a:p>
-            <a:pPr indent="0" marL="0">
+            <a:pPr marL="0" indent="0">
               <a:buNone/>
             </a:pPr>
             <a:r>
@@ -8659,7 +9296,7 @@
           <a:bodyPr wrap="square" lIns="0" tIns="0" rIns="0" bIns="0" rtlCol="0" anchor="ctr"/>
           <a:lstStyle/>
           <a:p>
-            <a:pPr indent="0" marL="0">
+            <a:pPr marL="0" indent="0">
               <a:buNone/>
             </a:pPr>
             <a:r>
@@ -8698,7 +9335,7 @@
           <a:bodyPr wrap="square" lIns="0" tIns="0" rIns="0" bIns="0" rtlCol="0" anchor="ctr"/>
           <a:lstStyle/>
           <a:p>
-            <a:pPr indent="0" marL="0">
+            <a:pPr marL="0" indent="0">
               <a:buNone/>
             </a:pPr>
             <a:r>
@@ -8740,13 +9377,20 @@
             <a:prstDash val="solid"/>
           </a:ln>
           <a:effectLst>
-            <a:outerShdw sx="100000" sy="100000" kx="0" ky="0" algn="bl" rotWithShape="0" blurRad="101600" dist="25400" dir="8100000">
+            <a:outerShdw blurRad="101600" dist="25400" dir="8100000" algn="bl" rotWithShape="0">
               <a:srgbClr val="000000">
                 <a:alpha val="12000"/>
               </a:srgbClr>
             </a:outerShdw>
           </a:effectLst>
         </p:spPr>
+        <p:txBody>
+          <a:bodyPr/>
+          <a:lstStyle/>
+          <a:p>
+            <a:endParaRPr lang="en-US"/>
+          </a:p>
+        </p:txBody>
       </p:sp>
       <p:sp>
         <p:nvSpPr>
@@ -8767,6 +9411,13 @@
           </a:solidFill>
           <a:ln/>
         </p:spPr>
+        <p:txBody>
+          <a:bodyPr/>
+          <a:lstStyle/>
+          <a:p>
+            <a:endParaRPr lang="en-US"/>
+          </a:p>
+        </p:txBody>
       </p:sp>
       <p:sp>
         <p:nvSpPr>
@@ -8789,11 +9440,11 @@
           <a:bodyPr wrap="square" lIns="0" tIns="0" rIns="0" bIns="0" rtlCol="0" anchor="ctr"/>
           <a:lstStyle/>
           <a:p>
-            <a:pPr indent="0" marL="0">
-              <a:buNone/>
-            </a:pPr>
-            <a:r>
-              <a:rPr lang="en-US" sz="900" spc="100" kern="0" dirty="0">
+            <a:pPr marL="0" indent="0">
+              <a:buNone/>
+            </a:pPr>
+            <a:r>
+              <a:rPr lang="en-US" sz="900" kern="0" spc="100" dirty="0">
                 <a:solidFill>
                   <a:srgbClr val="AADDFF"/>
                 </a:solidFill>
@@ -8803,13 +9454,10 @@
               </a:rPr>
               <a:t>Primary Server  </a:t>
             </a:r>
-            <a:pPr indent="0" marL="0">
-              <a:buNone/>
-            </a:pPr>
             <a:endParaRPr lang="en-US" sz="900" dirty="0"/>
           </a:p>
           <a:p>
-            <a:pPr indent="0" marL="0">
+            <a:pPr marL="0" indent="0">
               <a:buNone/>
             </a:pPr>
             <a:r>
@@ -8848,7 +9496,7 @@
           <a:bodyPr wrap="square" lIns="0" tIns="0" rIns="0" bIns="0" rtlCol="0" anchor="ctr"/>
           <a:lstStyle/>
           <a:p>
-            <a:pPr indent="0" marL="0">
+            <a:pPr marL="0" indent="0">
               <a:buNone/>
             </a:pPr>
             <a:r>
@@ -8887,7 +9535,7 @@
           <a:bodyPr wrap="square" lIns="0" tIns="0" rIns="0" bIns="0" rtlCol="0" anchor="ctr"/>
           <a:lstStyle/>
           <a:p>
-            <a:pPr indent="0" marL="0">
+            <a:pPr marL="0" indent="0">
               <a:buNone/>
             </a:pPr>
             <a:r>
@@ -8926,7 +9574,7 @@
           <a:bodyPr wrap="square" lIns="0" tIns="0" rIns="0" bIns="0" rtlCol="0" anchor="ctr"/>
           <a:lstStyle/>
           <a:p>
-            <a:pPr indent="0" marL="0">
+            <a:pPr marL="0" indent="0">
               <a:buNone/>
             </a:pPr>
             <a:r>
@@ -8968,13 +9616,20 @@
             <a:prstDash val="solid"/>
           </a:ln>
           <a:effectLst>
-            <a:outerShdw sx="100000" sy="100000" kx="0" ky="0" algn="bl" rotWithShape="0" blurRad="101600" dist="25400" dir="8100000">
+            <a:outerShdw blurRad="101600" dist="25400" dir="8100000" algn="bl" rotWithShape="0">
               <a:srgbClr val="000000">
                 <a:alpha val="12000"/>
               </a:srgbClr>
             </a:outerShdw>
           </a:effectLst>
         </p:spPr>
+        <p:txBody>
+          <a:bodyPr/>
+          <a:lstStyle/>
+          <a:p>
+            <a:endParaRPr lang="en-US"/>
+          </a:p>
+        </p:txBody>
       </p:sp>
       <p:sp>
         <p:nvSpPr>
@@ -8995,6 +9650,13 @@
           </a:solidFill>
           <a:ln/>
         </p:spPr>
+        <p:txBody>
+          <a:bodyPr/>
+          <a:lstStyle/>
+          <a:p>
+            <a:endParaRPr lang="en-US"/>
+          </a:p>
+        </p:txBody>
       </p:sp>
       <p:sp>
         <p:nvSpPr>
@@ -9017,11 +9679,11 @@
           <a:bodyPr wrap="square" lIns="0" tIns="0" rIns="0" bIns="0" rtlCol="0" anchor="ctr"/>
           <a:lstStyle/>
           <a:p>
-            <a:pPr indent="0" marL="0">
-              <a:buNone/>
-            </a:pPr>
-            <a:r>
-              <a:rPr lang="en-US" sz="900" spc="100" kern="0" dirty="0">
+            <a:pPr marL="0" indent="0">
+              <a:buNone/>
+            </a:pPr>
+            <a:r>
+              <a:rPr lang="en-US" sz="900" kern="0" spc="100" dirty="0">
                 <a:solidFill>
                   <a:srgbClr val="AADDFF"/>
                 </a:solidFill>
@@ -9031,13 +9693,10 @@
               </a:rPr>
               <a:t>Secondary Server  </a:t>
             </a:r>
-            <a:pPr indent="0" marL="0">
-              <a:buNone/>
-            </a:pPr>
             <a:endParaRPr lang="en-US" sz="900" dirty="0"/>
           </a:p>
           <a:p>
-            <a:pPr indent="0" marL="0">
+            <a:pPr marL="0" indent="0">
               <a:buNone/>
             </a:pPr>
             <a:r>
@@ -9076,7 +9735,7 @@
           <a:bodyPr wrap="square" lIns="0" tIns="0" rIns="0" bIns="0" rtlCol="0" anchor="ctr"/>
           <a:lstStyle/>
           <a:p>
-            <a:pPr indent="0" marL="0">
+            <a:pPr marL="0" indent="0">
               <a:buNone/>
             </a:pPr>
             <a:r>
@@ -9115,7 +9774,7 @@
           <a:bodyPr wrap="square" lIns="0" tIns="0" rIns="0" bIns="0" rtlCol="0" anchor="ctr"/>
           <a:lstStyle/>
           <a:p>
-            <a:pPr indent="0" marL="0">
+            <a:pPr marL="0" indent="0">
               <a:buNone/>
             </a:pPr>
             <a:r>
@@ -9154,7 +9813,7 @@
           <a:bodyPr wrap="square" lIns="0" tIns="0" rIns="0" bIns="0" rtlCol="0" anchor="ctr"/>
           <a:lstStyle/>
           <a:p>
-            <a:pPr indent="0" marL="0">
+            <a:pPr marL="0" indent="0">
               <a:buNone/>
             </a:pPr>
             <a:r>
@@ -9193,7 +9852,7 @@
           <a:bodyPr wrap="square" lIns="0" tIns="0" rIns="0" bIns="0" rtlCol="0" anchor="ctr"/>
           <a:lstStyle/>
           <a:p>
-            <a:pPr algn="ctr" indent="0" marL="0">
+            <a:pPr marL="0" indent="0" algn="ctr">
               <a:buNone/>
             </a:pPr>
             <a:r>
@@ -9232,7 +9891,7 @@
           <a:bodyPr wrap="square" lIns="0" tIns="0" rIns="0" bIns="0" rtlCol="0" anchor="ctr"/>
           <a:lstStyle/>
           <a:p>
-            <a:pPr algn="r" indent="0" marL="0">
+            <a:pPr marL="0" indent="0" algn="r">
               <a:buNone/>
             </a:pPr>
             <a:r>
@@ -9266,6 +9925,7 @@
         <a:solidFill>
           <a:srgbClr val="FFFFFF"/>
         </a:solidFill>
+        <a:effectLst/>
       </p:bgPr>
     </p:bg>
     <p:spTree>
@@ -9306,6 +9966,13 @@
             <a:prstDash val="solid"/>
           </a:ln>
         </p:spPr>
+        <p:txBody>
+          <a:bodyPr/>
+          <a:lstStyle/>
+          <a:p>
+            <a:endParaRPr lang="en-US"/>
+          </a:p>
+        </p:txBody>
       </p:sp>
       <p:sp>
         <p:nvSpPr>
@@ -9328,7 +9995,7 @@
           <a:bodyPr wrap="square" lIns="0" tIns="0" rIns="0" bIns="0" rtlCol="0" anchor="ctr"/>
           <a:lstStyle/>
           <a:p>
-            <a:pPr indent="0" marL="0">
+            <a:pPr marL="0" indent="0">
               <a:buNone/>
             </a:pPr>
             <a:r>
@@ -9370,6 +10037,13 @@
             <a:prstDash val="solid"/>
           </a:ln>
         </p:spPr>
+        <p:txBody>
+          <a:bodyPr/>
+          <a:lstStyle/>
+          <a:p>
+            <a:endParaRPr lang="en-US"/>
+          </a:p>
+        </p:txBody>
       </p:sp>
       <p:sp>
         <p:nvSpPr>
@@ -9392,7 +10066,7 @@
           <a:bodyPr wrap="square" lIns="0" tIns="0" rIns="0" bIns="0" rtlCol="0" anchor="ctr"/>
           <a:lstStyle/>
           <a:p>
-            <a:pPr indent="0" marL="0">
+            <a:pPr marL="0" indent="0">
               <a:buNone/>
             </a:pPr>
             <a:r>
@@ -9431,7 +10105,7 @@
           <a:bodyPr wrap="square" lIns="0" tIns="0" rIns="0" bIns="0" rtlCol="0" anchor="ctr"/>
           <a:lstStyle/>
           <a:p>
-            <a:pPr indent="0" marL="0">
+            <a:pPr marL="0" indent="0">
               <a:buNone/>
             </a:pPr>
             <a:r>
@@ -9470,7 +10144,7 @@
           <a:bodyPr wrap="square" lIns="0" tIns="0" rIns="0" bIns="0" rtlCol="0" anchor="ctr"/>
           <a:lstStyle/>
           <a:p>
-            <a:pPr indent="0" marL="0">
+            <a:pPr marL="0" indent="0">
               <a:buNone/>
             </a:pPr>
             <a:r>
@@ -9512,13 +10186,20 @@
             <a:prstDash val="solid"/>
           </a:ln>
           <a:effectLst>
-            <a:outerShdw sx="100000" sy="100000" kx="0" ky="0" algn="bl" rotWithShape="0" blurRad="101600" dist="25400" dir="8100000">
+            <a:outerShdw blurRad="101600" dist="25400" dir="8100000" algn="bl" rotWithShape="0">
               <a:srgbClr val="000000">
                 <a:alpha val="12000"/>
               </a:srgbClr>
             </a:outerShdw>
           </a:effectLst>
         </p:spPr>
+        <p:txBody>
+          <a:bodyPr/>
+          <a:lstStyle/>
+          <a:p>
+            <a:endParaRPr lang="en-US"/>
+          </a:p>
+        </p:txBody>
       </p:sp>
       <p:sp>
         <p:nvSpPr>
@@ -9539,6 +10220,13 @@
           </a:solidFill>
           <a:ln/>
         </p:spPr>
+        <p:txBody>
+          <a:bodyPr/>
+          <a:lstStyle/>
+          <a:p>
+            <a:endParaRPr lang="en-US"/>
+          </a:p>
+        </p:txBody>
       </p:sp>
       <p:sp>
         <p:nvSpPr>
@@ -9561,7 +10249,7 @@
           <a:bodyPr wrap="square" lIns="0" tIns="0" rIns="0" bIns="0" rtlCol="0" anchor="ctr"/>
           <a:lstStyle/>
           <a:p>
-            <a:pPr algn="ctr" indent="0" marL="0">
+            <a:pPr marL="0" indent="0" algn="ctr">
               <a:buNone/>
             </a:pPr>
             <a:r>
@@ -9600,7 +10288,7 @@
           <a:bodyPr wrap="square" lIns="0" tIns="0" rIns="0" bIns="0" rtlCol="0" anchor="ctr"/>
           <a:lstStyle/>
           <a:p>
-            <a:pPr indent="0" marL="0">
+            <a:pPr marL="0" indent="0">
               <a:buNone/>
             </a:pPr>
             <a:r>
@@ -9642,13 +10330,20 @@
             <a:prstDash val="solid"/>
           </a:ln>
           <a:effectLst>
-            <a:outerShdw sx="100000" sy="100000" kx="0" ky="0" algn="bl" rotWithShape="0" blurRad="101600" dist="25400" dir="8100000">
+            <a:outerShdw blurRad="101600" dist="25400" dir="8100000" algn="bl" rotWithShape="0">
               <a:srgbClr val="000000">
                 <a:alpha val="12000"/>
               </a:srgbClr>
             </a:outerShdw>
           </a:effectLst>
         </p:spPr>
+        <p:txBody>
+          <a:bodyPr/>
+          <a:lstStyle/>
+          <a:p>
+            <a:endParaRPr lang="en-US"/>
+          </a:p>
+        </p:txBody>
       </p:sp>
       <p:sp>
         <p:nvSpPr>
@@ -9669,6 +10364,13 @@
           </a:solidFill>
           <a:ln/>
         </p:spPr>
+        <p:txBody>
+          <a:bodyPr/>
+          <a:lstStyle/>
+          <a:p>
+            <a:endParaRPr lang="en-US"/>
+          </a:p>
+        </p:txBody>
       </p:sp>
       <p:sp>
         <p:nvSpPr>
@@ -9691,7 +10393,7 @@
           <a:bodyPr wrap="square" lIns="0" tIns="0" rIns="0" bIns="0" rtlCol="0" anchor="ctr"/>
           <a:lstStyle/>
           <a:p>
-            <a:pPr algn="ctr" indent="0" marL="0">
+            <a:pPr marL="0" indent="0" algn="ctr">
               <a:buNone/>
             </a:pPr>
             <a:r>
@@ -9730,7 +10432,7 @@
           <a:bodyPr wrap="square" lIns="0" tIns="0" rIns="0" bIns="0" rtlCol="0" anchor="ctr"/>
           <a:lstStyle/>
           <a:p>
-            <a:pPr indent="0" marL="0">
+            <a:pPr marL="0" indent="0">
               <a:buNone/>
             </a:pPr>
             <a:r>
@@ -9772,13 +10474,20 @@
             <a:prstDash val="solid"/>
           </a:ln>
           <a:effectLst>
-            <a:outerShdw sx="100000" sy="100000" kx="0" ky="0" algn="bl" rotWithShape="0" blurRad="101600" dist="25400" dir="8100000">
+            <a:outerShdw blurRad="101600" dist="25400" dir="8100000" algn="bl" rotWithShape="0">
               <a:srgbClr val="000000">
                 <a:alpha val="12000"/>
               </a:srgbClr>
             </a:outerShdw>
           </a:effectLst>
         </p:spPr>
+        <p:txBody>
+          <a:bodyPr/>
+          <a:lstStyle/>
+          <a:p>
+            <a:endParaRPr lang="en-US"/>
+          </a:p>
+        </p:txBody>
       </p:sp>
       <p:sp>
         <p:nvSpPr>
@@ -9801,11 +10510,11 @@
           <a:bodyPr wrap="square" lIns="0" tIns="0" rIns="0" bIns="0" rtlCol="0" anchor="ctr"/>
           <a:lstStyle/>
           <a:p>
-            <a:pPr algn="ctr" indent="0" marL="0">
-              <a:buNone/>
-            </a:pPr>
-            <a:r>
-              <a:rPr lang="en-US" sz="900" b="1" spc="150" kern="0" dirty="0">
+            <a:pPr marL="0" indent="0" algn="ctr">
+              <a:buNone/>
+            </a:pPr>
+            <a:r>
+              <a:rPr lang="en-US" sz="900" b="1" kern="0" spc="150" dirty="0">
                 <a:solidFill>
                   <a:srgbClr val="BDD7EE"/>
                 </a:solidFill>
@@ -9840,7 +10549,7 @@
           <a:bodyPr wrap="square" lIns="0" tIns="0" rIns="0" bIns="0" rtlCol="0" anchor="t"/>
           <a:lstStyle/>
           <a:p>
-            <a:pPr indent="0" marL="0">
+            <a:pPr marL="0" indent="0">
               <a:spcAft>
                 <a:spcPts val="100"/>
               </a:spcAft>
@@ -9860,7 +10569,7 @@
             <a:endParaRPr lang="en-US" sz="900" dirty="0"/>
           </a:p>
           <a:p>
-            <a:pPr indent="0" marL="0">
+            <a:pPr marL="0" indent="0">
               <a:spcAft>
                 <a:spcPts val="100"/>
               </a:spcAft>
@@ -9880,7 +10589,7 @@
             <a:endParaRPr lang="en-US" sz="900" dirty="0"/>
           </a:p>
           <a:p>
-            <a:pPr indent="0" marL="0">
+            <a:pPr marL="0" indent="0">
               <a:spcAft>
                 <a:spcPts val="100"/>
               </a:spcAft>
@@ -9900,7 +10609,7 @@
             <a:endParaRPr lang="en-US" sz="900" dirty="0"/>
           </a:p>
           <a:p>
-            <a:pPr indent="0" marL="0">
+            <a:pPr marL="0" indent="0">
               <a:spcAft>
                 <a:spcPts val="100"/>
               </a:spcAft>
@@ -9920,7 +10629,7 @@
             <a:endParaRPr lang="en-US" sz="900" dirty="0"/>
           </a:p>
           <a:p>
-            <a:pPr indent="0" marL="0">
+            <a:pPr marL="0" indent="0">
               <a:spcAft>
                 <a:spcPts val="100"/>
               </a:spcAft>
@@ -9940,7 +10649,7 @@
             <a:endParaRPr lang="en-US" sz="900" dirty="0"/>
           </a:p>
           <a:p>
-            <a:pPr indent="0" marL="0">
+            <a:pPr marL="0" indent="0">
               <a:spcAft>
                 <a:spcPts val="100"/>
               </a:spcAft>
@@ -9960,7 +10669,7 @@
             <a:endParaRPr lang="en-US" sz="900" dirty="0"/>
           </a:p>
           <a:p>
-            <a:pPr indent="0" marL="0">
+            <a:pPr marL="0" indent="0">
               <a:spcAft>
                 <a:spcPts val="100"/>
               </a:spcAft>
@@ -9980,7 +10689,7 @@
             <a:endParaRPr lang="en-US" sz="900" dirty="0"/>
           </a:p>
           <a:p>
-            <a:pPr indent="0" marL="0">
+            <a:pPr marL="0" indent="0">
               <a:spcAft>
                 <a:spcPts val="100"/>
               </a:spcAft>
@@ -10000,7 +10709,7 @@
             <a:endParaRPr lang="en-US" sz="900" dirty="0"/>
           </a:p>
           <a:p>
-            <a:pPr indent="0" marL="0">
+            <a:pPr marL="0" indent="0">
               <a:spcAft>
                 <a:spcPts val="100"/>
               </a:spcAft>
@@ -10020,7 +10729,7 @@
             <a:endParaRPr lang="en-US" sz="900" dirty="0"/>
           </a:p>
           <a:p>
-            <a:pPr indent="0" marL="0">
+            <a:pPr marL="0" indent="0">
               <a:spcAft>
                 <a:spcPts val="100"/>
               </a:spcAft>
@@ -10040,7 +10749,7 @@
             <a:endParaRPr lang="en-US" sz="900" dirty="0"/>
           </a:p>
           <a:p>
-            <a:pPr indent="0" marL="0">
+            <a:pPr marL="0" indent="0">
               <a:spcAft>
                 <a:spcPts val="100"/>
               </a:spcAft>
@@ -10060,7 +10769,7 @@
             <a:endParaRPr lang="en-US" sz="900" dirty="0"/>
           </a:p>
           <a:p>
-            <a:pPr indent="0" marL="0">
+            <a:pPr marL="0" indent="0">
               <a:spcAft>
                 <a:spcPts val="100"/>
               </a:spcAft>
@@ -10080,7 +10789,7 @@
             <a:endParaRPr lang="en-US" sz="900" dirty="0"/>
           </a:p>
           <a:p>
-            <a:pPr indent="0" marL="0">
+            <a:pPr marL="0" indent="0">
               <a:spcAft>
                 <a:spcPts val="100"/>
               </a:spcAft>
@@ -10100,7 +10809,7 @@
             <a:endParaRPr lang="en-US" sz="900" dirty="0"/>
           </a:p>
           <a:p>
-            <a:pPr indent="0" marL="0">
+            <a:pPr marL="0" indent="0">
               <a:spcAft>
                 <a:spcPts val="100"/>
               </a:spcAft>
@@ -10120,7 +10829,7 @@
             <a:endParaRPr lang="en-US" sz="900" dirty="0"/>
           </a:p>
           <a:p>
-            <a:pPr indent="0" marL="0">
+            <a:pPr marL="0" indent="0">
               <a:spcAft>
                 <a:spcPts val="100"/>
               </a:spcAft>
@@ -10140,7 +10849,7 @@
             <a:endParaRPr lang="en-US" sz="900" dirty="0"/>
           </a:p>
           <a:p>
-            <a:pPr indent="0" marL="0">
+            <a:pPr marL="0" indent="0">
               <a:spcAft>
                 <a:spcPts val="100"/>
               </a:spcAft>
@@ -10160,7 +10869,7 @@
             <a:endParaRPr lang="en-US" sz="900" dirty="0"/>
           </a:p>
           <a:p>
-            <a:pPr indent="0" marL="0">
+            <a:pPr marL="0" indent="0">
               <a:spcAft>
                 <a:spcPts val="100"/>
               </a:spcAft>
@@ -10180,7 +10889,7 @@
             <a:endParaRPr lang="en-US" sz="900" dirty="0"/>
           </a:p>
           <a:p>
-            <a:pPr indent="0" marL="0">
+            <a:pPr marL="0" indent="0">
               <a:spcAft>
                 <a:spcPts val="100"/>
               </a:spcAft>
@@ -10222,7 +10931,7 @@
           <a:bodyPr wrap="square" lIns="0" tIns="0" rIns="0" bIns="0" rtlCol="0" anchor="ctr"/>
           <a:lstStyle/>
           <a:p>
-            <a:pPr algn="r" indent="0" marL="0">
+            <a:pPr marL="0" indent="0" algn="r">
               <a:buNone/>
             </a:pPr>
             <a:r>
@@ -10256,6 +10965,7 @@
         <a:solidFill>
           <a:srgbClr val="F5F8FC"/>
         </a:solidFill>
+        <a:effectLst/>
       </p:bgPr>
     </p:bg>
     <p:spTree>
@@ -10296,6 +11006,13 @@
             <a:prstDash val="solid"/>
           </a:ln>
         </p:spPr>
+        <p:txBody>
+          <a:bodyPr/>
+          <a:lstStyle/>
+          <a:p>
+            <a:endParaRPr lang="en-US"/>
+          </a:p>
+        </p:txBody>
       </p:sp>
       <p:sp>
         <p:nvSpPr>
@@ -10318,7 +11035,7 @@
           <a:bodyPr wrap="square" lIns="0" tIns="0" rIns="0" bIns="0" rtlCol="0" anchor="ctr"/>
           <a:lstStyle/>
           <a:p>
-            <a:pPr indent="0" marL="0">
+            <a:pPr marL="0" indent="0">
               <a:buNone/>
             </a:pPr>
             <a:r>
@@ -10360,6 +11077,13 @@
             <a:prstDash val="solid"/>
           </a:ln>
         </p:spPr>
+        <p:txBody>
+          <a:bodyPr/>
+          <a:lstStyle/>
+          <a:p>
+            <a:endParaRPr lang="en-US"/>
+          </a:p>
+        </p:txBody>
       </p:sp>
       <p:sp>
         <p:nvSpPr>
@@ -10382,7 +11106,7 @@
           <a:bodyPr wrap="square" lIns="0" tIns="0" rIns="0" bIns="0" rtlCol="0" anchor="ctr"/>
           <a:lstStyle/>
           <a:p>
-            <a:pPr indent="0" marL="0">
+            <a:pPr marL="0" indent="0">
               <a:buNone/>
             </a:pPr>
             <a:r>
@@ -10421,7 +11145,7 @@
           <a:bodyPr wrap="square" lIns="0" tIns="0" rIns="0" bIns="0" rtlCol="0" anchor="ctr"/>
           <a:lstStyle/>
           <a:p>
-            <a:pPr indent="0" marL="0">
+            <a:pPr marL="0" indent="0">
               <a:buNone/>
             </a:pPr>
             <a:r>
@@ -10458,6 +11182,13 @@
           </a:solidFill>
           <a:ln/>
         </p:spPr>
+        <p:txBody>
+          <a:bodyPr/>
+          <a:lstStyle/>
+          <a:p>
+            <a:endParaRPr lang="en-US"/>
+          </a:p>
+        </p:txBody>
       </p:sp>
       <p:sp>
         <p:nvSpPr>
@@ -10480,7 +11211,7 @@
           <a:bodyPr wrap="square" lIns="0" tIns="0" rIns="0" bIns="0" rtlCol="0" anchor="ctr"/>
           <a:lstStyle/>
           <a:p>
-            <a:pPr indent="0" marL="0">
+            <a:pPr marL="0" indent="0">
               <a:buNone/>
             </a:pPr>
             <a:r>
@@ -10494,9 +11225,6 @@
               </a:rPr>
               <a:t>Format: </a:t>
             </a:r>
-            <a:pPr indent="0" marL="0">
-              <a:buNone/>
-            </a:pPr>
             <a:r>
               <a:rPr lang="en-US" sz="1100" dirty="0">
                 <a:solidFill>
@@ -10531,6 +11259,13 @@
           </a:solidFill>
           <a:ln/>
         </p:spPr>
+        <p:txBody>
+          <a:bodyPr/>
+          <a:lstStyle/>
+          <a:p>
+            <a:endParaRPr lang="en-US"/>
+          </a:p>
+        </p:txBody>
       </p:sp>
       <p:sp>
         <p:nvSpPr>
@@ -10553,7 +11288,7 @@
           <a:bodyPr wrap="square" lIns="0" tIns="0" rIns="0" bIns="0" rtlCol="0" anchor="ctr"/>
           <a:lstStyle/>
           <a:p>
-            <a:pPr indent="0" marL="0">
+            <a:pPr marL="0" indent="0">
               <a:buNone/>
             </a:pPr>
             <a:r>
@@ -10567,9 +11302,6 @@
               </a:rPr>
               <a:t>Coverage: </a:t>
             </a:r>
-            <a:pPr indent="0" marL="0">
-              <a:buNone/>
-            </a:pPr>
             <a:r>
               <a:rPr lang="en-US" sz="1100" dirty="0">
                 <a:solidFill>
@@ -10604,6 +11336,13 @@
           </a:solidFill>
           <a:ln/>
         </p:spPr>
+        <p:txBody>
+          <a:bodyPr/>
+          <a:lstStyle/>
+          <a:p>
+            <a:endParaRPr lang="en-US"/>
+          </a:p>
+        </p:txBody>
       </p:sp>
       <p:sp>
         <p:nvSpPr>
@@ -10626,7 +11365,7 @@
           <a:bodyPr wrap="square" lIns="0" tIns="0" rIns="0" bIns="0" rtlCol="0" anchor="ctr"/>
           <a:lstStyle/>
           <a:p>
-            <a:pPr indent="0" marL="0">
+            <a:pPr marL="0" indent="0">
               <a:buNone/>
             </a:pPr>
             <a:r>
@@ -10640,9 +11379,6 @@
               </a:rPr>
               <a:t>Update cadence: </a:t>
             </a:r>
-            <a:pPr indent="0" marL="0">
-              <a:buNone/>
-            </a:pPr>
             <a:r>
               <a:rPr lang="en-US" sz="1100" dirty="0">
                 <a:solidFill>
@@ -10677,6 +11413,13 @@
           </a:solidFill>
           <a:ln/>
         </p:spPr>
+        <p:txBody>
+          <a:bodyPr/>
+          <a:lstStyle/>
+          <a:p>
+            <a:endParaRPr lang="en-US"/>
+          </a:p>
+        </p:txBody>
       </p:sp>
       <p:sp>
         <p:nvSpPr>
@@ -10699,7 +11442,7 @@
           <a:bodyPr wrap="square" lIns="0" tIns="0" rIns="0" bIns="0" rtlCol="0" anchor="ctr"/>
           <a:lstStyle/>
           <a:p>
-            <a:pPr indent="0" marL="0">
+            <a:pPr marL="0" indent="0">
               <a:buNone/>
             </a:pPr>
             <a:r>
@@ -10713,9 +11456,6 @@
               </a:rPr>
               <a:t>Tool: </a:t>
             </a:r>
-            <a:pPr indent="0" marL="0">
-              <a:buNone/>
-            </a:pPr>
             <a:r>
               <a:rPr lang="en-US" sz="1100" dirty="0">
                 <a:solidFill>
@@ -10752,7 +11492,7 @@
           <a:bodyPr wrap="square" lIns="0" tIns="0" rIns="0" bIns="0" rtlCol="0" anchor="ctr"/>
           <a:lstStyle/>
           <a:p>
-            <a:pPr indent="0" marL="0">
+            <a:pPr marL="0" indent="0">
               <a:buNone/>
             </a:pPr>
             <a:r>
@@ -10794,13 +11534,20 @@
             <a:prstDash val="solid"/>
           </a:ln>
           <a:effectLst>
-            <a:outerShdw sx="100000" sy="100000" kx="0" ky="0" algn="bl" rotWithShape="0" blurRad="101600" dist="25400" dir="8100000">
+            <a:outerShdw blurRad="101600" dist="25400" dir="8100000" algn="bl" rotWithShape="0">
               <a:srgbClr val="000000">
                 <a:alpha val="12000"/>
               </a:srgbClr>
             </a:outerShdw>
           </a:effectLst>
         </p:spPr>
+        <p:txBody>
+          <a:bodyPr/>
+          <a:lstStyle/>
+          <a:p>
+            <a:endParaRPr lang="en-US"/>
+          </a:p>
+        </p:txBody>
       </p:sp>
       <p:sp>
         <p:nvSpPr>
@@ -10821,6 +11568,13 @@
           </a:solidFill>
           <a:ln/>
         </p:spPr>
+        <p:txBody>
+          <a:bodyPr/>
+          <a:lstStyle/>
+          <a:p>
+            <a:endParaRPr lang="en-US"/>
+          </a:p>
+        </p:txBody>
       </p:sp>
       <p:sp>
         <p:nvSpPr>
@@ -10843,7 +11597,7 @@
           <a:bodyPr wrap="square" lIns="0" tIns="0" rIns="0" bIns="0" rtlCol="0" anchor="ctr"/>
           <a:lstStyle/>
           <a:p>
-            <a:pPr indent="0" marL="0">
+            <a:pPr marL="0" indent="0">
               <a:buNone/>
             </a:pPr>
             <a:r>
@@ -10882,7 +11636,7 @@
           <a:bodyPr wrap="square" lIns="0" tIns="0" rIns="0" bIns="0" rtlCol="0" anchor="t"/>
           <a:lstStyle/>
           <a:p>
-            <a:pPr indent="0" marL="0">
+            <a:pPr marL="0" indent="0">
               <a:buNone/>
             </a:pPr>
             <a:r>
@@ -10924,13 +11678,20 @@
             <a:prstDash val="solid"/>
           </a:ln>
           <a:effectLst>
-            <a:outerShdw sx="100000" sy="100000" kx="0" ky="0" algn="bl" rotWithShape="0" blurRad="101600" dist="25400" dir="8100000">
+            <a:outerShdw blurRad="101600" dist="25400" dir="8100000" algn="bl" rotWithShape="0">
               <a:srgbClr val="000000">
                 <a:alpha val="12000"/>
               </a:srgbClr>
             </a:outerShdw>
           </a:effectLst>
         </p:spPr>
+        <p:txBody>
+          <a:bodyPr/>
+          <a:lstStyle/>
+          <a:p>
+            <a:endParaRPr lang="en-US"/>
+          </a:p>
+        </p:txBody>
       </p:sp>
       <p:sp>
         <p:nvSpPr>
@@ -10951,6 +11712,13 @@
           </a:solidFill>
           <a:ln/>
         </p:spPr>
+        <p:txBody>
+          <a:bodyPr/>
+          <a:lstStyle/>
+          <a:p>
+            <a:endParaRPr lang="en-US"/>
+          </a:p>
+        </p:txBody>
       </p:sp>
       <p:sp>
         <p:nvSpPr>
@@ -10973,7 +11741,7 @@
           <a:bodyPr wrap="square" lIns="0" tIns="0" rIns="0" bIns="0" rtlCol="0" anchor="ctr"/>
           <a:lstStyle/>
           <a:p>
-            <a:pPr indent="0" marL="0">
+            <a:pPr marL="0" indent="0">
               <a:buNone/>
             </a:pPr>
             <a:r>
@@ -11012,7 +11780,7 @@
           <a:bodyPr wrap="square" lIns="0" tIns="0" rIns="0" bIns="0" rtlCol="0" anchor="t"/>
           <a:lstStyle/>
           <a:p>
-            <a:pPr indent="0" marL="0">
+            <a:pPr marL="0" indent="0">
               <a:buNone/>
             </a:pPr>
             <a:r>
@@ -11054,13 +11822,20 @@
             <a:prstDash val="solid"/>
           </a:ln>
           <a:effectLst>
-            <a:outerShdw sx="100000" sy="100000" kx="0" ky="0" algn="bl" rotWithShape="0" blurRad="101600" dist="25400" dir="8100000">
+            <a:outerShdw blurRad="101600" dist="25400" dir="8100000" algn="bl" rotWithShape="0">
               <a:srgbClr val="000000">
                 <a:alpha val="12000"/>
               </a:srgbClr>
             </a:outerShdw>
           </a:effectLst>
         </p:spPr>
+        <p:txBody>
+          <a:bodyPr/>
+          <a:lstStyle/>
+          <a:p>
+            <a:endParaRPr lang="en-US"/>
+          </a:p>
+        </p:txBody>
       </p:sp>
       <p:sp>
         <p:nvSpPr>
@@ -11081,6 +11856,13 @@
           </a:solidFill>
           <a:ln/>
         </p:spPr>
+        <p:txBody>
+          <a:bodyPr/>
+          <a:lstStyle/>
+          <a:p>
+            <a:endParaRPr lang="en-US"/>
+          </a:p>
+        </p:txBody>
       </p:sp>
       <p:sp>
         <p:nvSpPr>
@@ -11103,7 +11885,7 @@
           <a:bodyPr wrap="square" lIns="0" tIns="0" rIns="0" bIns="0" rtlCol="0" anchor="ctr"/>
           <a:lstStyle/>
           <a:p>
-            <a:pPr indent="0" marL="0">
+            <a:pPr marL="0" indent="0">
               <a:buNone/>
             </a:pPr>
             <a:r>
@@ -11142,7 +11924,7 @@
           <a:bodyPr wrap="square" lIns="0" tIns="0" rIns="0" bIns="0" rtlCol="0" anchor="t"/>
           <a:lstStyle/>
           <a:p>
-            <a:pPr indent="0" marL="0">
+            <a:pPr marL="0" indent="0">
               <a:buNone/>
             </a:pPr>
             <a:r>
@@ -11181,7 +11963,7 @@
           <a:bodyPr wrap="square" lIns="0" tIns="0" rIns="0" bIns="0" rtlCol="0" anchor="ctr"/>
           <a:lstStyle/>
           <a:p>
-            <a:pPr algn="ctr" indent="0" marL="0">
+            <a:pPr marL="0" indent="0" algn="ctr">
               <a:buNone/>
             </a:pPr>
             <a:r>
@@ -11220,7 +12002,7 @@
           <a:bodyPr wrap="square" lIns="0" tIns="0" rIns="0" bIns="0" rtlCol="0" anchor="ctr"/>
           <a:lstStyle/>
           <a:p>
-            <a:pPr algn="r" indent="0" marL="0">
+            <a:pPr marL="0" indent="0" algn="r">
               <a:buNone/>
             </a:pPr>
             <a:r>
@@ -11254,6 +12036,7 @@
         <a:solidFill>
           <a:srgbClr val="FFFFFF"/>
         </a:solidFill>
+        <a:effectLst/>
       </p:bgPr>
     </p:bg>
     <p:spTree>
@@ -11294,6 +12077,13 @@
             <a:prstDash val="solid"/>
           </a:ln>
         </p:spPr>
+        <p:txBody>
+          <a:bodyPr/>
+          <a:lstStyle/>
+          <a:p>
+            <a:endParaRPr lang="en-US"/>
+          </a:p>
+        </p:txBody>
       </p:sp>
       <p:sp>
         <p:nvSpPr>
@@ -11316,7 +12106,7 @@
           <a:bodyPr wrap="square" lIns="0" tIns="0" rIns="0" bIns="0" rtlCol="0" anchor="ctr"/>
           <a:lstStyle/>
           <a:p>
-            <a:pPr indent="0" marL="0">
+            <a:pPr marL="0" indent="0">
               <a:buNone/>
             </a:pPr>
             <a:r>
@@ -11358,6 +12148,13 @@
             <a:prstDash val="solid"/>
           </a:ln>
         </p:spPr>
+        <p:txBody>
+          <a:bodyPr/>
+          <a:lstStyle/>
+          <a:p>
+            <a:endParaRPr lang="en-US"/>
+          </a:p>
+        </p:txBody>
       </p:sp>
       <p:sp>
         <p:nvSpPr>
@@ -11383,13 +12180,20 @@
             <a:prstDash val="solid"/>
           </a:ln>
           <a:effectLst>
-            <a:outerShdw sx="100000" sy="100000" kx="0" ky="0" algn="bl" rotWithShape="0" blurRad="101600" dist="25400" dir="8100000">
+            <a:outerShdw blurRad="101600" dist="25400" dir="8100000" algn="bl" rotWithShape="0">
               <a:srgbClr val="000000">
                 <a:alpha val="12000"/>
               </a:srgbClr>
             </a:outerShdw>
           </a:effectLst>
         </p:spPr>
+        <p:txBody>
+          <a:bodyPr/>
+          <a:lstStyle/>
+          <a:p>
+            <a:endParaRPr lang="en-US"/>
+          </a:p>
+        </p:txBody>
       </p:sp>
       <p:sp>
         <p:nvSpPr>
@@ -11410,6 +12214,13 @@
           </a:solidFill>
           <a:ln/>
         </p:spPr>
+        <p:txBody>
+          <a:bodyPr/>
+          <a:lstStyle/>
+          <a:p>
+            <a:endParaRPr lang="en-US"/>
+          </a:p>
+        </p:txBody>
       </p:sp>
       <p:sp>
         <p:nvSpPr>
@@ -11430,17 +12241,24 @@
           </a:solidFill>
           <a:ln/>
         </p:spPr>
+        <p:txBody>
+          <a:bodyPr/>
+          <a:lstStyle/>
+          <a:p>
+            <a:endParaRPr lang="en-US"/>
+          </a:p>
+        </p:txBody>
       </p:sp>
       <p:pic>
         <p:nvPicPr>
-          <p:cNvPr id="8" name="Image 0" descr="preencoded.png">    </p:cNvPr>
+          <p:cNvPr id="8" name="Image 0" descr="preencoded.png"/>
           <p:cNvPicPr>
             <a:picLocks noChangeAspect="1"/>
           </p:cNvPicPr>
           <p:nvPr/>
         </p:nvPicPr>
         <p:blipFill>
-          <a:blip r:embed="rId1"/>
+          <a:blip r:embed="rId3"/>
           <a:stretch>
             <a:fillRect/>
           </a:stretch>
@@ -11476,7 +12294,7 @@
           <a:bodyPr wrap="square" lIns="0" tIns="0" rIns="0" bIns="0" rtlCol="0" anchor="ctr"/>
           <a:lstStyle/>
           <a:p>
-            <a:pPr indent="0" marL="0">
+            <a:pPr marL="0" indent="0">
               <a:buNone/>
             </a:pPr>
             <a:r>
@@ -11493,7 +12311,7 @@
             <a:endParaRPr lang="en-US" sz="1300" dirty="0"/>
           </a:p>
           <a:p>
-            <a:pPr indent="0" marL="0">
+            <a:pPr marL="0" indent="0">
               <a:buNone/>
             </a:pPr>
             <a:r>
@@ -11532,7 +12350,7 @@
           <a:bodyPr wrap="square" lIns="0" tIns="0" rIns="0" bIns="0" rtlCol="0" anchor="t"/>
           <a:lstStyle/>
           <a:p>
-            <a:pPr indent="0" marL="0">
+            <a:pPr marL="0" indent="0">
               <a:buNone/>
             </a:pPr>
             <a:r>
@@ -11574,13 +12392,20 @@
             <a:prstDash val="solid"/>
           </a:ln>
           <a:effectLst>
-            <a:outerShdw sx="100000" sy="100000" kx="0" ky="0" algn="bl" rotWithShape="0" blurRad="101600" dist="25400" dir="8100000">
+            <a:outerShdw blurRad="101600" dist="25400" dir="8100000" algn="bl" rotWithShape="0">
               <a:srgbClr val="000000">
                 <a:alpha val="12000"/>
               </a:srgbClr>
             </a:outerShdw>
           </a:effectLst>
         </p:spPr>
+        <p:txBody>
+          <a:bodyPr/>
+          <a:lstStyle/>
+          <a:p>
+            <a:endParaRPr lang="en-US"/>
+          </a:p>
+        </p:txBody>
       </p:sp>
       <p:sp>
         <p:nvSpPr>
@@ -11601,6 +12426,13 @@
           </a:solidFill>
           <a:ln/>
         </p:spPr>
+        <p:txBody>
+          <a:bodyPr/>
+          <a:lstStyle/>
+          <a:p>
+            <a:endParaRPr lang="en-US"/>
+          </a:p>
+        </p:txBody>
       </p:sp>
       <p:sp>
         <p:nvSpPr>
@@ -11621,17 +12453,24 @@
           </a:solidFill>
           <a:ln/>
         </p:spPr>
+        <p:txBody>
+          <a:bodyPr/>
+          <a:lstStyle/>
+          <a:p>
+            <a:endParaRPr lang="en-US"/>
+          </a:p>
+        </p:txBody>
       </p:sp>
       <p:pic>
         <p:nvPicPr>
-          <p:cNvPr id="14" name="Image 1" descr="preencoded.png">    </p:cNvPr>
+          <p:cNvPr id="14" name="Image 1" descr="preencoded.png"/>
           <p:cNvPicPr>
             <a:picLocks noChangeAspect="1"/>
           </p:cNvPicPr>
           <p:nvPr/>
         </p:nvPicPr>
         <p:blipFill>
-          <a:blip r:embed="rId2"/>
+          <a:blip r:embed="rId4"/>
           <a:stretch>
             <a:fillRect/>
           </a:stretch>
@@ -11667,7 +12506,7 @@
           <a:bodyPr wrap="square" lIns="0" tIns="0" rIns="0" bIns="0" rtlCol="0" anchor="ctr"/>
           <a:lstStyle/>
           <a:p>
-            <a:pPr indent="0" marL="0">
+            <a:pPr marL="0" indent="0">
               <a:buNone/>
             </a:pPr>
             <a:r>
@@ -11684,7 +12523,7 @@
             <a:endParaRPr lang="en-US" sz="1300" dirty="0"/>
           </a:p>
           <a:p>
-            <a:pPr indent="0" marL="0">
+            <a:pPr marL="0" indent="0">
               <a:buNone/>
             </a:pPr>
             <a:r>
@@ -11723,7 +12562,7 @@
           <a:bodyPr wrap="square" lIns="0" tIns="0" rIns="0" bIns="0" rtlCol="0" anchor="t"/>
           <a:lstStyle/>
           <a:p>
-            <a:pPr indent="0" marL="0">
+            <a:pPr marL="0" indent="0">
               <a:buNone/>
             </a:pPr>
             <a:r>
@@ -11765,13 +12604,20 @@
             <a:prstDash val="solid"/>
           </a:ln>
           <a:effectLst>
-            <a:outerShdw sx="100000" sy="100000" kx="0" ky="0" algn="bl" rotWithShape="0" blurRad="101600" dist="25400" dir="8100000">
+            <a:outerShdw blurRad="101600" dist="25400" dir="8100000" algn="bl" rotWithShape="0">
               <a:srgbClr val="000000">
                 <a:alpha val="12000"/>
               </a:srgbClr>
             </a:outerShdw>
           </a:effectLst>
         </p:spPr>
+        <p:txBody>
+          <a:bodyPr/>
+          <a:lstStyle/>
+          <a:p>
+            <a:endParaRPr lang="en-US"/>
+          </a:p>
+        </p:txBody>
       </p:sp>
       <p:sp>
         <p:nvSpPr>
@@ -11792,6 +12638,13 @@
           </a:solidFill>
           <a:ln/>
         </p:spPr>
+        <p:txBody>
+          <a:bodyPr/>
+          <a:lstStyle/>
+          <a:p>
+            <a:endParaRPr lang="en-US"/>
+          </a:p>
+        </p:txBody>
       </p:sp>
       <p:sp>
         <p:nvSpPr>
@@ -11812,17 +12665,24 @@
           </a:solidFill>
           <a:ln/>
         </p:spPr>
+        <p:txBody>
+          <a:bodyPr/>
+          <a:lstStyle/>
+          <a:p>
+            <a:endParaRPr lang="en-US"/>
+          </a:p>
+        </p:txBody>
       </p:sp>
       <p:pic>
         <p:nvPicPr>
-          <p:cNvPr id="20" name="Image 2" descr="preencoded.png">    </p:cNvPr>
+          <p:cNvPr id="20" name="Image 2" descr="preencoded.png"/>
           <p:cNvPicPr>
             <a:picLocks noChangeAspect="1"/>
           </p:cNvPicPr>
           <p:nvPr/>
         </p:nvPicPr>
         <p:blipFill>
-          <a:blip r:embed="rId3"/>
+          <a:blip r:embed="rId5"/>
           <a:stretch>
             <a:fillRect/>
           </a:stretch>
@@ -11858,7 +12718,7 @@
           <a:bodyPr wrap="square" lIns="0" tIns="0" rIns="0" bIns="0" rtlCol="0" anchor="ctr"/>
           <a:lstStyle/>
           <a:p>
-            <a:pPr indent="0" marL="0">
+            <a:pPr marL="0" indent="0">
               <a:buNone/>
             </a:pPr>
             <a:r>
@@ -11875,7 +12735,7 @@
             <a:endParaRPr lang="en-US" sz="1300" dirty="0"/>
           </a:p>
           <a:p>
-            <a:pPr indent="0" marL="0">
+            <a:pPr marL="0" indent="0">
               <a:buNone/>
             </a:pPr>
             <a:r>
@@ -11914,7 +12774,7 @@
           <a:bodyPr wrap="square" lIns="0" tIns="0" rIns="0" bIns="0" rtlCol="0" anchor="t"/>
           <a:lstStyle/>
           <a:p>
-            <a:pPr indent="0" marL="0">
+            <a:pPr marL="0" indent="0">
               <a:buNone/>
             </a:pPr>
             <a:r>
@@ -11956,13 +12816,20 @@
             <a:prstDash val="solid"/>
           </a:ln>
           <a:effectLst>
-            <a:outerShdw sx="100000" sy="100000" kx="0" ky="0" algn="bl" rotWithShape="0" blurRad="101600" dist="25400" dir="8100000">
+            <a:outerShdw blurRad="101600" dist="25400" dir="8100000" algn="bl" rotWithShape="0">
               <a:srgbClr val="000000">
                 <a:alpha val="12000"/>
               </a:srgbClr>
             </a:outerShdw>
           </a:effectLst>
         </p:spPr>
+        <p:txBody>
+          <a:bodyPr/>
+          <a:lstStyle/>
+          <a:p>
+            <a:endParaRPr lang="en-US"/>
+          </a:p>
+        </p:txBody>
       </p:sp>
       <p:sp>
         <p:nvSpPr>
@@ -11983,6 +12850,13 @@
           </a:solidFill>
           <a:ln/>
         </p:spPr>
+        <p:txBody>
+          <a:bodyPr/>
+          <a:lstStyle/>
+          <a:p>
+            <a:endParaRPr lang="en-US"/>
+          </a:p>
+        </p:txBody>
       </p:sp>
       <p:sp>
         <p:nvSpPr>
@@ -12003,17 +12877,24 @@
           </a:solidFill>
           <a:ln/>
         </p:spPr>
+        <p:txBody>
+          <a:bodyPr/>
+          <a:lstStyle/>
+          <a:p>
+            <a:endParaRPr lang="en-US"/>
+          </a:p>
+        </p:txBody>
       </p:sp>
       <p:pic>
         <p:nvPicPr>
-          <p:cNvPr id="26" name="Image 3" descr="preencoded.png">    </p:cNvPr>
+          <p:cNvPr id="26" name="Image 3" descr="preencoded.png"/>
           <p:cNvPicPr>
             <a:picLocks noChangeAspect="1"/>
           </p:cNvPicPr>
           <p:nvPr/>
         </p:nvPicPr>
         <p:blipFill>
-          <a:blip r:embed="rId4"/>
+          <a:blip r:embed="rId6"/>
           <a:stretch>
             <a:fillRect/>
           </a:stretch>
@@ -12049,7 +12930,7 @@
           <a:bodyPr wrap="square" lIns="0" tIns="0" rIns="0" bIns="0" rtlCol="0" anchor="ctr"/>
           <a:lstStyle/>
           <a:p>
-            <a:pPr indent="0" marL="0">
+            <a:pPr marL="0" indent="0">
               <a:buNone/>
             </a:pPr>
             <a:r>
@@ -12066,7 +12947,7 @@
             <a:endParaRPr lang="en-US" sz="1300" dirty="0"/>
           </a:p>
           <a:p>
-            <a:pPr indent="0" marL="0">
+            <a:pPr marL="0" indent="0">
               <a:buNone/>
             </a:pPr>
             <a:r>
@@ -12105,7 +12986,7 @@
           <a:bodyPr wrap="square" lIns="0" tIns="0" rIns="0" bIns="0" rtlCol="0" anchor="t"/>
           <a:lstStyle/>
           <a:p>
-            <a:pPr indent="0" marL="0">
+            <a:pPr marL="0" indent="0">
               <a:buNone/>
             </a:pPr>
             <a:r>
@@ -12147,13 +13028,20 @@
             <a:prstDash val="solid"/>
           </a:ln>
           <a:effectLst>
-            <a:outerShdw sx="100000" sy="100000" kx="0" ky="0" algn="bl" rotWithShape="0" blurRad="101600" dist="25400" dir="8100000">
+            <a:outerShdw blurRad="101600" dist="25400" dir="8100000" algn="bl" rotWithShape="0">
               <a:srgbClr val="000000">
                 <a:alpha val="12000"/>
               </a:srgbClr>
             </a:outerShdw>
           </a:effectLst>
         </p:spPr>
+        <p:txBody>
+          <a:bodyPr/>
+          <a:lstStyle/>
+          <a:p>
+            <a:endParaRPr lang="en-US"/>
+          </a:p>
+        </p:txBody>
       </p:sp>
       <p:sp>
         <p:nvSpPr>
@@ -12174,6 +13062,13 @@
           </a:solidFill>
           <a:ln/>
         </p:spPr>
+        <p:txBody>
+          <a:bodyPr/>
+          <a:lstStyle/>
+          <a:p>
+            <a:endParaRPr lang="en-US"/>
+          </a:p>
+        </p:txBody>
       </p:sp>
       <p:sp>
         <p:nvSpPr>
@@ -12194,17 +13089,24 @@
           </a:solidFill>
           <a:ln/>
         </p:spPr>
+        <p:txBody>
+          <a:bodyPr/>
+          <a:lstStyle/>
+          <a:p>
+            <a:endParaRPr lang="en-US"/>
+          </a:p>
+        </p:txBody>
       </p:sp>
       <p:pic>
         <p:nvPicPr>
-          <p:cNvPr id="32" name="Image 4" descr="preencoded.png">    </p:cNvPr>
+          <p:cNvPr id="32" name="Image 4" descr="preencoded.png"/>
           <p:cNvPicPr>
             <a:picLocks noChangeAspect="1"/>
           </p:cNvPicPr>
           <p:nvPr/>
         </p:nvPicPr>
         <p:blipFill>
-          <a:blip r:embed="rId5"/>
+          <a:blip r:embed="rId7"/>
           <a:stretch>
             <a:fillRect/>
           </a:stretch>
@@ -12240,7 +13142,7 @@
           <a:bodyPr wrap="square" lIns="0" tIns="0" rIns="0" bIns="0" rtlCol="0" anchor="ctr"/>
           <a:lstStyle/>
           <a:p>
-            <a:pPr indent="0" marL="0">
+            <a:pPr marL="0" indent="0">
               <a:buNone/>
             </a:pPr>
             <a:r>
@@ -12257,7 +13159,7 @@
             <a:endParaRPr lang="en-US" sz="1300" dirty="0"/>
           </a:p>
           <a:p>
-            <a:pPr indent="0" marL="0">
+            <a:pPr marL="0" indent="0">
               <a:buNone/>
             </a:pPr>
             <a:r>
@@ -12296,7 +13198,7 @@
           <a:bodyPr wrap="square" lIns="0" tIns="0" rIns="0" bIns="0" rtlCol="0" anchor="t"/>
           <a:lstStyle/>
           <a:p>
-            <a:pPr indent="0" marL="0">
+            <a:pPr marL="0" indent="0">
               <a:buNone/>
             </a:pPr>
             <a:r>
@@ -12338,13 +13240,20 @@
             <a:prstDash val="solid"/>
           </a:ln>
           <a:effectLst>
-            <a:outerShdw sx="100000" sy="100000" kx="0" ky="0" algn="bl" rotWithShape="0" blurRad="101600" dist="25400" dir="8100000">
+            <a:outerShdw blurRad="101600" dist="25400" dir="8100000" algn="bl" rotWithShape="0">
               <a:srgbClr val="000000">
                 <a:alpha val="12000"/>
               </a:srgbClr>
             </a:outerShdw>
           </a:effectLst>
         </p:spPr>
+        <p:txBody>
+          <a:bodyPr/>
+          <a:lstStyle/>
+          <a:p>
+            <a:endParaRPr lang="en-US"/>
+          </a:p>
+        </p:txBody>
       </p:sp>
       <p:sp>
         <p:nvSpPr>
@@ -12365,6 +13274,13 @@
           </a:solidFill>
           <a:ln/>
         </p:spPr>
+        <p:txBody>
+          <a:bodyPr/>
+          <a:lstStyle/>
+          <a:p>
+            <a:endParaRPr lang="en-US"/>
+          </a:p>
+        </p:txBody>
       </p:sp>
       <p:sp>
         <p:nvSpPr>
@@ -12385,17 +13301,24 @@
           </a:solidFill>
           <a:ln/>
         </p:spPr>
+        <p:txBody>
+          <a:bodyPr/>
+          <a:lstStyle/>
+          <a:p>
+            <a:endParaRPr lang="en-US"/>
+          </a:p>
+        </p:txBody>
       </p:sp>
       <p:pic>
         <p:nvPicPr>
-          <p:cNvPr id="38" name="Image 5" descr="preencoded.png">    </p:cNvPr>
+          <p:cNvPr id="38" name="Image 5" descr="preencoded.png"/>
           <p:cNvPicPr>
             <a:picLocks noChangeAspect="1"/>
           </p:cNvPicPr>
           <p:nvPr/>
         </p:nvPicPr>
         <p:blipFill>
-          <a:blip r:embed="rId6"/>
+          <a:blip r:embed="rId8"/>
           <a:stretch>
             <a:fillRect/>
           </a:stretch>
@@ -12431,7 +13354,7 @@
           <a:bodyPr wrap="square" lIns="0" tIns="0" rIns="0" bIns="0" rtlCol="0" anchor="ctr"/>
           <a:lstStyle/>
           <a:p>
-            <a:pPr indent="0" marL="0">
+            <a:pPr marL="0" indent="0">
               <a:buNone/>
             </a:pPr>
             <a:r>
@@ -12448,7 +13371,7 @@
             <a:endParaRPr lang="en-US" sz="1300" dirty="0"/>
           </a:p>
           <a:p>
-            <a:pPr indent="0" marL="0">
+            <a:pPr marL="0" indent="0">
               <a:buNone/>
             </a:pPr>
             <a:r>
@@ -12487,7 +13410,7 @@
           <a:bodyPr wrap="square" lIns="0" tIns="0" rIns="0" bIns="0" rtlCol="0" anchor="t"/>
           <a:lstStyle/>
           <a:p>
-            <a:pPr indent="0" marL="0">
+            <a:pPr marL="0" indent="0">
               <a:buNone/>
             </a:pPr>
             <a:r>
@@ -12526,7 +13449,7 @@
           <a:bodyPr wrap="square" lIns="0" tIns="0" rIns="0" bIns="0" rtlCol="0" anchor="ctr"/>
           <a:lstStyle/>
           <a:p>
-            <a:pPr algn="r" indent="0" marL="0">
+            <a:pPr marL="0" indent="0" algn="r">
               <a:buNone/>
             </a:pPr>
             <a:r>
@@ -12845,4 +13768,319 @@
     </a:ext>
   </a:extLst>
 </a:theme>
+</file>
+
+<file path=ppt/theme/theme2.xml><?xml version="1.0" encoding="utf-8"?>
+<a:theme xmlns:a="http://schemas.openxmlformats.org/drawingml/2006/main" name="Office Theme">
+  <a:themeElements>
+    <a:clrScheme name="Office">
+      <a:dk1>
+        <a:sysClr val="windowText" lastClr="000000"/>
+      </a:dk1>
+      <a:lt1>
+        <a:sysClr val="window" lastClr="FFFFFF"/>
+      </a:lt1>
+      <a:dk2>
+        <a:srgbClr val="0E2841"/>
+      </a:dk2>
+      <a:lt2>
+        <a:srgbClr val="E8E8E8"/>
+      </a:lt2>
+      <a:accent1>
+        <a:srgbClr val="156082"/>
+      </a:accent1>
+      <a:accent2>
+        <a:srgbClr val="E97132"/>
+      </a:accent2>
+      <a:accent3>
+        <a:srgbClr val="196B24"/>
+      </a:accent3>
+      <a:accent4>
+        <a:srgbClr val="0F9ED5"/>
+      </a:accent4>
+      <a:accent5>
+        <a:srgbClr val="A02B93"/>
+      </a:accent5>
+      <a:accent6>
+        <a:srgbClr val="4EA72E"/>
+      </a:accent6>
+      <a:hlink>
+        <a:srgbClr val="467886"/>
+      </a:hlink>
+      <a:folHlink>
+        <a:srgbClr val="96607D"/>
+      </a:folHlink>
+    </a:clrScheme>
+    <a:fontScheme name="Office">
+      <a:majorFont>
+        <a:latin typeface="Aptos Display" panose="02110004020202020204"/>
+        <a:ea typeface=""/>
+        <a:cs typeface=""/>
+        <a:font script="Jpan" typeface="游ゴシック Light"/>
+        <a:font script="Hang" typeface="맑은 고딕"/>
+        <a:font script="Hans" typeface="等线 Light"/>
+        <a:font script="Hant" typeface="新細明體"/>
+        <a:font script="Arab" typeface="Times New Roman"/>
+        <a:font script="Hebr" typeface="Times New Roman"/>
+        <a:font script="Thai" typeface="Angsana New"/>
+        <a:font script="Ethi" typeface="Nyala"/>
+        <a:font script="Beng" typeface="Vrinda"/>
+        <a:font script="Gujr" typeface="Shruti"/>
+        <a:font script="Khmr" typeface="MoolBoran"/>
+        <a:font script="Knda" typeface="Tunga"/>
+        <a:font script="Guru" typeface="Raavi"/>
+        <a:font script="Cans" typeface="Euphemia"/>
+        <a:font script="Cher" typeface="Plantagenet Cherokee"/>
+        <a:font script="Yiii" typeface="Microsoft Yi Baiti"/>
+        <a:font script="Tibt" typeface="Microsoft Himalaya"/>
+        <a:font script="Thaa" typeface="MV Boli"/>
+        <a:font script="Deva" typeface="Mangal"/>
+        <a:font script="Telu" typeface="Gautami"/>
+        <a:font script="Taml" typeface="Latha"/>
+        <a:font script="Syrc" typeface="Estrangelo Edessa"/>
+        <a:font script="Orya" typeface="Kalinga"/>
+        <a:font script="Mlym" typeface="Kartika"/>
+        <a:font script="Laoo" typeface="DokChampa"/>
+        <a:font script="Sinh" typeface="Iskoola Pota"/>
+        <a:font script="Mong" typeface="Mongolian Baiti"/>
+        <a:font script="Viet" typeface="Times New Roman"/>
+        <a:font script="Uigh" typeface="Microsoft Uighur"/>
+        <a:font script="Geor" typeface="Sylfaen"/>
+        <a:font script="Armn" typeface="Arial"/>
+        <a:font script="Bugi" typeface="Leelawadee UI"/>
+        <a:font script="Bopo" typeface="Microsoft JhengHei"/>
+        <a:font script="Java" typeface="Javanese Text"/>
+        <a:font script="Lisu" typeface="Segoe UI"/>
+        <a:font script="Mymr" typeface="Myanmar Text"/>
+        <a:font script="Nkoo" typeface="Ebrima"/>
+        <a:font script="Olck" typeface="Nirmala UI"/>
+        <a:font script="Osma" typeface="Ebrima"/>
+        <a:font script="Phag" typeface="Phagspa"/>
+        <a:font script="Syrn" typeface="Estrangelo Edessa"/>
+        <a:font script="Syrj" typeface="Estrangelo Edessa"/>
+        <a:font script="Syre" typeface="Estrangelo Edessa"/>
+        <a:font script="Sora" typeface="Nirmala UI"/>
+        <a:font script="Tale" typeface="Microsoft Tai Le"/>
+        <a:font script="Talu" typeface="Microsoft New Tai Lue"/>
+        <a:font script="Tfng" typeface="Ebrima"/>
+      </a:majorFont>
+      <a:minorFont>
+        <a:latin typeface="Aptos" panose="02110004020202020204"/>
+        <a:ea typeface=""/>
+        <a:cs typeface=""/>
+        <a:font script="Jpan" typeface="游ゴシック"/>
+        <a:font script="Hang" typeface="맑은 고딕"/>
+        <a:font script="Hans" typeface="等线"/>
+        <a:font script="Hant" typeface="新細明體"/>
+        <a:font script="Arab" typeface="Arial"/>
+        <a:font script="Hebr" typeface="Arial"/>
+        <a:font script="Thai" typeface="Cordia New"/>
+        <a:font script="Ethi" typeface="Nyala"/>
+        <a:font script="Beng" typeface="Vrinda"/>
+        <a:font script="Gujr" typeface="Shruti"/>
+        <a:font script="Khmr" typeface="DaunPenh"/>
+        <a:font script="Knda" typeface="Tunga"/>
+        <a:font script="Guru" typeface="Raavi"/>
+        <a:font script="Cans" typeface="Euphemia"/>
+        <a:font script="Cher" typeface="Plantagenet Cherokee"/>
+        <a:font script="Yiii" typeface="Microsoft Yi Baiti"/>
+        <a:font script="Tibt" typeface="Microsoft Himalaya"/>
+        <a:font script="Thaa" typeface="MV Boli"/>
+        <a:font script="Deva" typeface="Mangal"/>
+        <a:font script="Telu" typeface="Gautami"/>
+        <a:font script="Taml" typeface="Latha"/>
+        <a:font script="Syrc" typeface="Estrangelo Edessa"/>
+        <a:font script="Orya" typeface="Kalinga"/>
+        <a:font script="Mlym" typeface="Kartika"/>
+        <a:font script="Laoo" typeface="DokChampa"/>
+        <a:font script="Sinh" typeface="Iskoola Pota"/>
+        <a:font script="Mong" typeface="Mongolian Baiti"/>
+        <a:font script="Viet" typeface="Arial"/>
+        <a:font script="Uigh" typeface="Microsoft Uighur"/>
+        <a:font script="Geor" typeface="Sylfaen"/>
+        <a:font script="Armn" typeface="Arial"/>
+        <a:font script="Bugi" typeface="Leelawadee UI"/>
+        <a:font script="Bopo" typeface="Microsoft JhengHei"/>
+        <a:font script="Java" typeface="Javanese Text"/>
+        <a:font script="Lisu" typeface="Segoe UI"/>
+        <a:font script="Mymr" typeface="Myanmar Text"/>
+        <a:font script="Nkoo" typeface="Ebrima"/>
+        <a:font script="Olck" typeface="Nirmala UI"/>
+        <a:font script="Osma" typeface="Ebrima"/>
+        <a:font script="Phag" typeface="Phagspa"/>
+        <a:font script="Syrn" typeface="Estrangelo Edessa"/>
+        <a:font script="Syrj" typeface="Estrangelo Edessa"/>
+        <a:font script="Syre" typeface="Estrangelo Edessa"/>
+        <a:font script="Sora" typeface="Nirmala UI"/>
+        <a:font script="Tale" typeface="Microsoft Tai Le"/>
+        <a:font script="Talu" typeface="Microsoft New Tai Lue"/>
+        <a:font script="Tfng" typeface="Ebrima"/>
+      </a:minorFont>
+    </a:fontScheme>
+    <a:fmtScheme name="Office">
+      <a:fillStyleLst>
+        <a:solidFill>
+          <a:schemeClr val="phClr"/>
+        </a:solidFill>
+        <a:gradFill rotWithShape="1">
+          <a:gsLst>
+            <a:gs pos="0">
+              <a:schemeClr val="phClr">
+                <a:lumMod val="110000"/>
+                <a:satMod val="105000"/>
+                <a:tint val="67000"/>
+              </a:schemeClr>
+            </a:gs>
+            <a:gs pos="50000">
+              <a:schemeClr val="phClr">
+                <a:lumMod val="105000"/>
+                <a:satMod val="103000"/>
+                <a:tint val="73000"/>
+              </a:schemeClr>
+            </a:gs>
+            <a:gs pos="100000">
+              <a:schemeClr val="phClr">
+                <a:lumMod val="105000"/>
+                <a:satMod val="109000"/>
+                <a:tint val="81000"/>
+              </a:schemeClr>
+            </a:gs>
+          </a:gsLst>
+          <a:lin ang="5400000" scaled="0"/>
+        </a:gradFill>
+        <a:gradFill rotWithShape="1">
+          <a:gsLst>
+            <a:gs pos="0">
+              <a:schemeClr val="phClr">
+                <a:satMod val="103000"/>
+                <a:lumMod val="102000"/>
+                <a:tint val="94000"/>
+              </a:schemeClr>
+            </a:gs>
+            <a:gs pos="50000">
+              <a:schemeClr val="phClr">
+                <a:satMod val="110000"/>
+                <a:lumMod val="100000"/>
+                <a:shade val="100000"/>
+              </a:schemeClr>
+            </a:gs>
+            <a:gs pos="100000">
+              <a:schemeClr val="phClr">
+                <a:lumMod val="99000"/>
+                <a:satMod val="120000"/>
+                <a:shade val="78000"/>
+              </a:schemeClr>
+            </a:gs>
+          </a:gsLst>
+          <a:lin ang="5400000" scaled="0"/>
+        </a:gradFill>
+      </a:fillStyleLst>
+      <a:lnStyleLst>
+        <a:ln w="12700" cap="flat" cmpd="sng" algn="ctr">
+          <a:solidFill>
+            <a:schemeClr val="phClr"/>
+          </a:solidFill>
+          <a:prstDash val="solid"/>
+          <a:miter lim="800000"/>
+        </a:ln>
+        <a:ln w="19050" cap="flat" cmpd="sng" algn="ctr">
+          <a:solidFill>
+            <a:schemeClr val="phClr"/>
+          </a:solidFill>
+          <a:prstDash val="solid"/>
+          <a:miter lim="800000"/>
+        </a:ln>
+        <a:ln w="25400" cap="flat" cmpd="sng" algn="ctr">
+          <a:solidFill>
+            <a:schemeClr val="phClr"/>
+          </a:solidFill>
+          <a:prstDash val="solid"/>
+          <a:miter lim="800000"/>
+        </a:ln>
+      </a:lnStyleLst>
+      <a:effectStyleLst>
+        <a:effectStyle>
+          <a:effectLst/>
+        </a:effectStyle>
+        <a:effectStyle>
+          <a:effectLst/>
+        </a:effectStyle>
+        <a:effectStyle>
+          <a:effectLst>
+            <a:outerShdw blurRad="57150" dist="19050" dir="5400000" algn="ctr" rotWithShape="0">
+              <a:srgbClr val="000000">
+                <a:alpha val="63000"/>
+              </a:srgbClr>
+            </a:outerShdw>
+          </a:effectLst>
+        </a:effectStyle>
+      </a:effectStyleLst>
+      <a:bgFillStyleLst>
+        <a:solidFill>
+          <a:schemeClr val="phClr"/>
+        </a:solidFill>
+        <a:solidFill>
+          <a:schemeClr val="phClr">
+            <a:tint val="95000"/>
+            <a:satMod val="170000"/>
+          </a:schemeClr>
+        </a:solidFill>
+        <a:gradFill rotWithShape="1">
+          <a:gsLst>
+            <a:gs pos="0">
+              <a:schemeClr val="phClr">
+                <a:tint val="93000"/>
+                <a:satMod val="150000"/>
+                <a:shade val="98000"/>
+                <a:lumMod val="102000"/>
+              </a:schemeClr>
+            </a:gs>
+            <a:gs pos="50000">
+              <a:schemeClr val="phClr">
+                <a:tint val="98000"/>
+                <a:satMod val="130000"/>
+                <a:shade val="90000"/>
+                <a:lumMod val="103000"/>
+              </a:schemeClr>
+            </a:gs>
+            <a:gs pos="100000">
+              <a:schemeClr val="phClr">
+                <a:shade val="63000"/>
+                <a:satMod val="120000"/>
+              </a:schemeClr>
+            </a:gs>
+          </a:gsLst>
+          <a:lin ang="5400000" scaled="0"/>
+        </a:gradFill>
+      </a:bgFillStyleLst>
+    </a:fmtScheme>
+  </a:themeElements>
+  <a:objectDefaults>
+    <a:lnDef>
+      <a:spPr/>
+      <a:bodyPr/>
+      <a:lstStyle/>
+      <a:style>
+        <a:lnRef idx="2">
+          <a:schemeClr val="accent1"/>
+        </a:lnRef>
+        <a:fillRef idx="0">
+          <a:schemeClr val="accent1"/>
+        </a:fillRef>
+        <a:effectRef idx="1">
+          <a:schemeClr val="accent1"/>
+        </a:effectRef>
+        <a:fontRef idx="minor">
+          <a:schemeClr val="tx1"/>
+        </a:fontRef>
+      </a:style>
+    </a:lnDef>
+  </a:objectDefaults>
+  <a:extraClrSchemeLst/>
+  <a:extLst>
+    <a:ext uri="{05A4C25C-085E-4340-85A3-A5531E510DB2}">
+      <thm15:themeFamily xmlns:thm15="http://schemas.microsoft.com/office/thememl/2012/main" name="Office Theme" id="{2E142A2C-CD16-42D6-873A-C26D2A0506FA}" vid="{1BDDFF52-6CD6-40A5-AB3C-68EB2F1E4D0A}"/>
+    </a:ext>
+  </a:extLst>
+</a:theme>
 </file>